--- a/docs/submission/Tax-Referee-5-slides.pptx
+++ b/docs/submission/Tax-Referee-5-slides.pptx
@@ -111,27 +111,27 @@
   <p:extLst>
     <p:ext uri="{521415D9-36F7-43E2-AB2F-B90AF26B5E84}">
       <p14:sectionLst xmlns:p14="http://schemas.microsoft.com/office/powerpoint/2010/main">
-        <p14:section name="1 · Vấn đề" id="{9cd75de9-358b-993c-3822-aefd2953db36}">
+        <p14:section name="1 · Vấn đề" id="{891286f9-7456-8608-daa4-820f2c7a2bb5}">
           <p14:sldIdLst>
             <p14:sldId id="256"/>
           </p14:sldIdLst>
         </p14:section>
-        <p14:section name="2 · Đầu vào → Xử lý → Đầu ra" id="{ccc2ff38-5695-4dd7-e3e5-cbea570cbd80}">
+        <p14:section name="2 · Đầu vào → Xử lý → Đầu ra" id="{19cf9828-06f5-a373-7ff1-3bde21485b2f}">
           <p14:sldIdLst>
             <p14:sldId id="257"/>
           </p14:sldIdLst>
         </p14:section>
-        <p14:section name="3 · Tác động" id="{df9d4313-e0f9-de7b-8f1a-c08965d93324}">
+        <p14:section name="3 · Tác động" id="{1c6a4c70-2b3a-2f9c-a02b-77213cd8c631}">
           <p14:sldIdLst>
             <p14:sldId id="258"/>
           </p14:sldIdLst>
         </p14:section>
-        <p14:section name="4 · Kiến trúc" id="{e3d320ce-d85c-ffde-335d-0945a7252a26}">
+        <p14:section name="4 · Kiến trúc" id="{d4f3dec4-5a6f-8e40-a462-d67acbb989b7}">
           <p14:sldIdLst>
             <p14:sldId id="259"/>
           </p14:sldIdLst>
         </p14:section>
-        <p14:section name="5 · Giới hạn và rủi ro" id="{d97203d5-eb93-13e4-ace0-432bcbc2b518}">
+        <p14:section name="5 · Giới hạn và rủi ro" id="{f305a9d3-a3b0-6cfb-40aa-b3bf1635ee68}">
           <p14:sldIdLst>
             <p14:sldId id="260"/>
           </p14:sldIdLst>
@@ -716,7 +716,7 @@
           <a:p>
             <a:r>
               <a:rPr lang="en-US" dirty="0"/>
-              <a:t>Số liệu A đo trên hệ thống, tái lập bằng scripts/qa/compare-rehearsal.ts (docs/evidence/before-after-judge-rehearsal-2026-10-14.md): đúng 3/11 → 11/11, hỏi thừa 3/3 → 0/3, sai nhóm 4/8 → 0/8, câu hỏi cụ thể 1/10 → 8/8. Nói rõ giới hạn. Ô người dùng chỉ điền số thật ngày 16/10; nếu chưa có, nói "chưa có".</a:t>
+              <a:t>Số liệu A đo trên hệ thống, tái lập bằng scripts/qa/compare-rehearsal.ts (docs/evidence/before-after-judge-rehearsal-2026-10-14.md): đúng 3/11 → 11/11, hỏi thừa 3/3 → 0/3, sai nhóm 4/8 → 0/8, câu hỏi cụ thể 1/10 → 8/8. Red team: 72 ca bẫy do agent viết từ SOP mà không đọc mã engine, lần đầu đúng 66/72, sau khi sửa 72/72, nay là bộ hồi quy trong npm test (data/verification/redteam/cases.json). Nói rõ giới hạn. Ô người dùng chỉ điền số thật ngày 16/10; nếu chưa có, nói "chưa có".</a:t>
             </a:r>
             <a:endParaRPr lang="en-US" dirty="0"/>
           </a:p>
@@ -4195,7 +4195,7 @@
                   <a:schemeClr val="tx1"/>
                 </a:solidFill>
               </a:rPr>
-              <a:t>Cùng 11 ca, cùng script, 2 phiên bản mã nguồn</a:t>
+              <a:t>11 ca, 2 bản mã, DB tạm, không gọi AI</a:t>
             </a:r>
             <a:endParaRPr lang="en-US" sz="1200" dirty="0"/>
           </a:p>
@@ -4213,7 +4213,7 @@
                   <a:schemeClr val="tx1"/>
                 </a:solidFill>
               </a:rPr>
-              <a:t>Mỗi ca một database tạm, không gọi AI</a:t>
+              <a:t>72 ca bẫy agent viết từ SOP: 66 → 72/72</a:t>
             </a:r>
             <a:endParaRPr lang="en-US" sz="1200" dirty="0"/>
           </a:p>
@@ -4231,7 +4231,7 @@
                   <a:schemeClr val="tx1"/>
                 </a:solidFill>
               </a:rPr>
-              <a:t>Giới hạn: ca do đội viết — tập phát triển, chưa phải đánh giá độc lập</a:t>
+              <a:t>Giới hạn: ca do đội/AI viết — chưa phải đánh giá độc lập</a:t>
             </a:r>
             <a:endParaRPr lang="en-US" sz="1200" dirty="0"/>
           </a:p>

--- a/docs/submission/Tax-Referee-5-slides.pptx
+++ b/docs/submission/Tax-Referee-5-slides.pptx
@@ -111,27 +111,27 @@
   <p:extLst>
     <p:ext uri="{521415D9-36F7-43E2-AB2F-B90AF26B5E84}">
       <p14:sectionLst xmlns:p14="http://schemas.microsoft.com/office/powerpoint/2010/main">
-        <p14:section name="1 · Vấn đề" id="{891286f9-7456-8608-daa4-820f2c7a2bb5}">
+        <p14:section name="1 · Vấn đề" id="{60d7db1d-c610-4710-dbce-22a062a97172}">
           <p14:sldIdLst>
             <p14:sldId id="256"/>
           </p14:sldIdLst>
         </p14:section>
-        <p14:section name="2 · Đầu vào → Xử lý → Đầu ra" id="{19cf9828-06f5-a373-7ff1-3bde21485b2f}">
+        <p14:section name="2 · Đầu vào → Xử lý → Đầu ra" id="{3ef0afc0-4bf2-0222-f41f-63f6ab2c9cbe}">
           <p14:sldIdLst>
             <p14:sldId id="257"/>
           </p14:sldIdLst>
         </p14:section>
-        <p14:section name="3 · Tác động" id="{1c6a4c70-2b3a-2f9c-a02b-77213cd8c631}">
+        <p14:section name="3 · Tác động" id="{5fe31499-b952-5cbf-486b-56e90f00c1d7}">
           <p14:sldIdLst>
             <p14:sldId id="258"/>
           </p14:sldIdLst>
         </p14:section>
-        <p14:section name="4 · Kiến trúc" id="{d4f3dec4-5a6f-8e40-a462-d67acbb989b7}">
+        <p14:section name="4 · Kiến trúc" id="{a51b8ac6-e632-ee58-43cb-d97cb0673ae1}">
           <p14:sldIdLst>
             <p14:sldId id="259"/>
           </p14:sldIdLst>
         </p14:section>
-        <p14:section name="5 · Giới hạn và rủi ro" id="{f305a9d3-a3b0-6cfb-40aa-b3bf1635ee68}">
+        <p14:section name="5 · Giới hạn và rủi ro" id="{e1d2edf7-89df-1202-e130-7fe716371a9a}">
           <p14:sldIdLst>
             <p14:sldId id="260"/>
           </p14:sldIdLst>
@@ -716,7 +716,7 @@
           <a:p>
             <a:r>
               <a:rPr lang="en-US" dirty="0"/>
-              <a:t>Số liệu A đo trên hệ thống, tái lập bằng scripts/qa/compare-rehearsal.ts (docs/evidence/before-after-judge-rehearsal-2026-10-14.md): đúng 3/11 → 11/11, hỏi thừa 3/3 → 0/3, sai nhóm 4/8 → 0/8, câu hỏi cụ thể 1/10 → 8/8. Red team: 72 ca bẫy do agent viết từ SOP mà không đọc mã engine, lần đầu đúng 66/72, sau khi sửa 72/72, nay là bộ hồi quy trong npm test (data/verification/redteam/cases.json). Nói rõ giới hạn. Ô người dùng chỉ điền số thật ngày 16/10; nếu chưa có, nói "chưa có".</a:t>
+              <a:t>Số liệu A đo trên hệ thống, tái lập bằng scripts/qa/compare-rehearsal.ts (docs/evidence/before-after-judge-rehearsal-2026-10-14.md): đúng 3/11 → 11/11, hỏi thừa 3/3 → 0/3, sai nhóm 4/8 → 0/8, câu hỏi qua kiểm tra tự động (có số tiền ₫, không chứa “chứng từ gốc/xem danh sách”) 1/10 → 8/8 — mẫu số khác nhau: bản cũ chuyển tiếp 10 ca gồm 3 ca thường quy bị hỏi thừa, bản mới 8 ca. Tái lập: chạy compare-rehearsal.ts với thư mục làm việc là phiên bản cần đo (xem file evidence). Red team: 72 ca bẫy do agent viết từ SOP (không đọc policyEngine.ts, có đọc SOP và module ngưỡng; nhãn do AI gán), lần đầu đúng 66/72, sau khi sửa 72/72, nay là bộ hồi quy trong npm test (data/verification/redteam/cases.json). Nói rõ giới hạn. Ô người dùng chỉ điền số thật ngày 16/10; nếu chưa có, nói "chưa có".</a:t>
             </a:r>
             <a:endParaRPr lang="en-US" dirty="0"/>
           </a:p>
@@ -4104,7 +4104,7 @@
                   <a:schemeClr val="tx1"/>
                 </a:solidFill>
               </a:rPr>
-              <a:t>câu hỏi có số tiền cụ thể, không bắt mở lại chứng từ</a:t>
+              <a:t>câu hỏi có số ₫, không đòi chứng từ gốc (kiểm tự động)</a:t>
             </a:r>
             <a:endParaRPr lang="en-US" sz="1200" dirty="0"/>
           </a:p>

--- a/docs/submission/Tax-Referee-5-slides.pptx
+++ b/docs/submission/Tax-Referee-5-slides.pptx
@@ -111,27 +111,27 @@
   <p:extLst>
     <p:ext uri="{521415D9-36F7-43E2-AB2F-B90AF26B5E84}">
       <p14:sectionLst xmlns:p14="http://schemas.microsoft.com/office/powerpoint/2010/main">
-        <p14:section name="1 · Vấn đề" id="{60d7db1d-c610-4710-dbce-22a062a97172}">
+        <p14:section name="1 · Vấn đề" id="{a819fb21-550d-8f01-41c5-cca0a634d355}">
           <p14:sldIdLst>
             <p14:sldId id="256"/>
           </p14:sldIdLst>
         </p14:section>
-        <p14:section name="2 · Đầu vào → Xử lý → Đầu ra" id="{3ef0afc0-4bf2-0222-f41f-63f6ab2c9cbe}">
+        <p14:section name="2 · Đầu vào → Xử lý → Đầu ra" id="{27366c94-5c75-13e8-3160-e43e2de2ee94}">
           <p14:sldIdLst>
             <p14:sldId id="257"/>
           </p14:sldIdLst>
         </p14:section>
-        <p14:section name="3 · Tác động" id="{5fe31499-b952-5cbf-486b-56e90f00c1d7}">
+        <p14:section name="3 · Tác động" id="{39911a7b-a35b-9861-c692-49130b467075}">
           <p14:sldIdLst>
             <p14:sldId id="258"/>
           </p14:sldIdLst>
         </p14:section>
-        <p14:section name="4 · Kiến trúc" id="{a51b8ac6-e632-ee58-43cb-d97cb0673ae1}">
+        <p14:section name="4 · Kiến trúc" id="{06c1286b-09aa-0380-003a-49b5668f3821}">
           <p14:sldIdLst>
             <p14:sldId id="259"/>
           </p14:sldIdLst>
         </p14:section>
-        <p14:section name="5 · Giới hạn và rủi ro" id="{e1d2edf7-89df-1202-e130-7fe716371a9a}">
+        <p14:section name="5 · Giới hạn và rủi ro" id="{015e27ab-3276-927d-97e1-2edbe43d84e6}">
           <p14:sldIdLst>
             <p14:sldId id="260"/>
           </p14:sldIdLst>
@@ -2344,26 +2344,50 @@
                 <a:ea typeface="Cambria" pitchFamily="34" charset="-122"/>
                 <a:cs typeface="Cambria" pitchFamily="34" charset="-120"/>
               </a:rPr>
-              <a:t>Máy tự xử lý, con người quyết ở 3 điểm</a:t>
+              <a:t>Đầu vào → Xử lý → Đầu ra</a:t>
             </a:r>
             <a:endParaRPr lang="en-US" sz="3000" dirty="0"/>
           </a:p>
         </p:txBody>
       </p:sp>
-      <p:sp>
-        <p:nvSpPr>
-          <p:cNvPr id="3" name="Flow 1"/>
+      <p:pic>
+        <p:nvPicPr>
+          <p:cNvPr id="3" name="Pipeline diagram" descr="D:/TAX_MLAI/docs/diagrams/s1-pipeline-slide.png">    </p:cNvPr>
+          <p:cNvPicPr>
+            <a:picLocks noChangeAspect="1"/>
+          </p:cNvPicPr>
+          <p:nvPr/>
+        </p:nvPicPr>
+        <p:blipFill>
+          <a:blip r:embed="rId1"/>
+          <a:stretch>
+            <a:fillRect/>
+          </a:stretch>
+        </p:blipFill>
+        <p:spPr>
+          <a:xfrm>
+            <a:off x="457200" y="1024128"/>
+            <a:ext cx="8229600" cy="1192180"/>
+          </a:xfrm>
+          <a:prstGeom prst="rect">
+            <a:avLst/>
+          </a:prstGeom>
+        </p:spPr>
+      </p:pic>
+      <p:sp>
+        <p:nvSpPr>
+          <p:cNvPr id="4" name="Group card 1"/>
           <p:cNvSpPr/>
           <p:nvPr/>
         </p:nvSpPr>
         <p:spPr>
           <a:xfrm>
-            <a:off x="457200" y="1051560"/>
-            <a:ext cx="2377440" cy="1234440"/>
+            <a:off x="457200" y="2487168"/>
+            <a:ext cx="2651760" cy="1536192"/>
           </a:xfrm>
           <a:prstGeom prst="roundRect">
             <a:avLst>
-              <a:gd name="adj" fmla="val 8889"/>
+              <a:gd name="adj" fmla="val 7143"/>
             </a:avLst>
           </a:prstGeom>
           <a:solidFill>
@@ -2386,14 +2410,39 @@
       </p:sp>
       <p:sp>
         <p:nvSpPr>
-          <p:cNvPr id="4" name="Flow 1 head"/>
+          <p:cNvPr id="5" name="Group 1 badge"/>
+          <p:cNvSpPr/>
+          <p:nvPr/>
+        </p:nvSpPr>
+        <p:spPr>
+          <a:xfrm>
+            <a:off x="594360" y="2596896"/>
+            <a:ext cx="384048" cy="384048"/>
+          </a:xfrm>
+          <a:prstGeom prst="ellipse">
+            <a:avLst/>
+          </a:prstGeom>
+          <a:solidFill>
+            <a:schemeClr val="accent3"/>
+          </a:solidFill>
+          <a:ln w="12700">
+            <a:solidFill>
+              <a:schemeClr val="accent3"/>
+            </a:solidFill>
+            <a:prstDash val="solid"/>
+          </a:ln>
+        </p:spPr>
+      </p:sp>
+      <p:sp>
+        <p:nvSpPr>
+          <p:cNvPr id="6" name="Group 1 badge text"/>
           <p:cNvSpPr txBox="1"/>
           <p:nvPr/>
         </p:nvSpPr>
         <p:spPr>
           <a:xfrm>
-            <a:off x="594360" y="1115568"/>
-            <a:ext cx="2103120" cy="274320"/>
+            <a:off x="594360" y="2596896"/>
+            <a:ext cx="384048" cy="384048"/>
           </a:xfrm>
           <a:prstGeom prst="rect">
             <a:avLst/>
@@ -2405,16 +2454,88 @@
           <a:bodyPr wrap="square" lIns="0" tIns="0" rIns="0" bIns="0" rtlCol="0" anchor="ctr"/>
           <a:lstStyle/>
           <a:p>
+            <a:pPr algn="ctr" indent="0" marL="0">
+              <a:buNone/>
+            </a:pPr>
+            <a:r>
+              <a:rPr lang="en-US" sz="1300" b="1" dirty="0">
+                <a:solidFill>
+                  <a:schemeClr val="bg1"/>
+                </a:solidFill>
+              </a:rPr>
+              <a:t>1</a:t>
+            </a:r>
+            <a:endParaRPr lang="en-US" sz="1300" dirty="0"/>
+          </a:p>
+        </p:txBody>
+      </p:sp>
+      <p:sp>
+        <p:nvSpPr>
+          <p:cNvPr id="7" name="Group 1 label"/>
+          <p:cNvSpPr txBox="1"/>
+          <p:nvPr/>
+        </p:nvSpPr>
+        <p:spPr>
+          <a:xfrm>
+            <a:off x="1051560" y="2596896"/>
+            <a:ext cx="1463040" cy="384048"/>
+          </a:xfrm>
+          <a:prstGeom prst="rect">
+            <a:avLst/>
+          </a:prstGeom>
+          <a:noFill/>
+          <a:ln/>
+        </p:spPr>
+        <p:txBody>
+          <a:bodyPr wrap="square" lIns="0" tIns="0" rIns="0" bIns="0" rtlCol="0" anchor="ctr"/>
+          <a:lstStyle/>
+          <a:p>
             <a:pPr indent="0" marL="0">
+              <a:buNone/>
+            </a:pPr>
+            <a:r>
+              <a:rPr lang="en-US" sz="1400" b="1" dirty="0">
+                <a:solidFill>
+                  <a:schemeClr val="accent3"/>
+                </a:solidFill>
+              </a:rPr>
+              <a:t>Chưa rõ thông tin</a:t>
+            </a:r>
+            <a:endParaRPr lang="en-US" sz="1400" dirty="0"/>
+          </a:p>
+        </p:txBody>
+      </p:sp>
+      <p:sp>
+        <p:nvSpPr>
+          <p:cNvPr id="8" name="Group 1 recipient"/>
+          <p:cNvSpPr txBox="1"/>
+          <p:nvPr/>
+        </p:nvSpPr>
+        <p:spPr>
+          <a:xfrm>
+            <a:off x="2423160" y="2596896"/>
+            <a:ext cx="548640" cy="384048"/>
+          </a:xfrm>
+          <a:prstGeom prst="rect">
+            <a:avLst/>
+          </a:prstGeom>
+          <a:noFill/>
+          <a:ln/>
+        </p:spPr>
+        <p:txBody>
+          <a:bodyPr wrap="square" lIns="0" tIns="0" rIns="0" bIns="0" rtlCol="0" anchor="ctr"/>
+          <a:lstStyle/>
+          <a:p>
+            <a:pPr algn="r" indent="0" marL="0">
               <a:buNone/>
             </a:pPr>
             <a:r>
               <a:rPr lang="en-US" sz="1200" b="1" dirty="0">
                 <a:solidFill>
-                  <a:schemeClr val="accent1"/>
+                  <a:schemeClr val="tx2"/>
                 </a:solidFill>
               </a:rPr>
-              <a:t>ĐẦU VÀO</a:t>
+              <a:t>→ KTT</a:t>
             </a:r>
             <a:endParaRPr lang="en-US" sz="1200" dirty="0"/>
           </a:p>
@@ -2422,14 +2543,14 @@
       </p:sp>
       <p:sp>
         <p:nvSpPr>
-          <p:cNvPr id="5" name="Flow 1 body"/>
+          <p:cNvPr id="9" name="Group 1 question"/>
           <p:cNvSpPr txBox="1"/>
           <p:nvPr/>
         </p:nvSpPr>
         <p:spPr>
           <a:xfrm>
-            <a:off x="594360" y="1417320"/>
-            <a:ext cx="2103120" cy="822960"/>
+            <a:off x="594360" y="3035808"/>
+            <a:ext cx="2377440" cy="914400"/>
           </a:xfrm>
           <a:prstGeom prst="rect">
             <a:avLst/>
@@ -2442,247 +2563,34 @@
           <a:lstStyle/>
           <a:p>
             <a:pPr indent="0" marL="0">
-              <a:spcAft>
-                <a:spcPts val="200"/>
-              </a:spcAft>
               <a:buNone/>
             </a:pPr>
             <a:r>
-              <a:rPr lang="en-US" sz="1200" dirty="0">
+              <a:rPr lang="en-US" sz="1150" i="1" dirty="0">
                 <a:solidFill>
                   <a:schemeClr val="tx1"/>
                 </a:solidFill>
               </a:rPr>
-              <a:t>XML hóa đơn điện tử (TT78)</a:t>
+              <a:t>“Tổng in 480.000₫ lệch tiền hàng + thuế = 495.000₫. A: 495.000₫ — sửa; hay B: 480.000₫ — yêu cầu NCC điều chỉnh?”</a:t>
             </a:r>
-            <a:endParaRPr lang="en-US" sz="1200" dirty="0"/>
-          </a:p>
-          <a:p>
-            <a:pPr indent="0" marL="0">
-              <a:spcAft>
-                <a:spcPts val="200"/>
-              </a:spcAft>
-              <a:buNone/>
-            </a:pPr>
-            <a:r>
-              <a:rPr lang="en-US" sz="1200" dirty="0">
-                <a:solidFill>
-                  <a:schemeClr val="tx1"/>
-                </a:solidFill>
-              </a:rPr>
-              <a:t>PDF, ảnh chụp, nhập tay</a:t>
-            </a:r>
-            <a:endParaRPr lang="en-US" sz="1200" dirty="0"/>
+            <a:endParaRPr lang="en-US" sz="1150" dirty="0"/>
           </a:p>
         </p:txBody>
       </p:sp>
       <p:sp>
         <p:nvSpPr>
-          <p:cNvPr id="6" name="Flow arrow 1"/>
+          <p:cNvPr id="10" name="Group card 2"/>
           <p:cNvSpPr/>
           <p:nvPr/>
         </p:nvSpPr>
         <p:spPr>
           <a:xfrm>
-            <a:off x="2880360" y="1527048"/>
-            <a:ext cx="228600" cy="274320"/>
-          </a:xfrm>
-          <a:prstGeom prst="rightArrow">
-            <a:avLst/>
-          </a:prstGeom>
-          <a:solidFill>
-            <a:schemeClr val="tx2"/>
-          </a:solidFill>
-          <a:ln w="12700">
-            <a:solidFill>
-              <a:schemeClr val="tx2"/>
-            </a:solidFill>
-            <a:prstDash val="solid"/>
-          </a:ln>
-        </p:spPr>
-      </p:sp>
-      <p:sp>
-        <p:nvSpPr>
-          <p:cNvPr id="7" name="Flow 2"/>
-          <p:cNvSpPr/>
-          <p:nvPr/>
-        </p:nvSpPr>
-        <p:spPr>
-          <a:xfrm>
-            <a:off x="3154680" y="1051560"/>
-            <a:ext cx="2743200" cy="1234440"/>
+            <a:off x="3246120" y="2487168"/>
+            <a:ext cx="2651760" cy="1536192"/>
           </a:xfrm>
           <a:prstGeom prst="roundRect">
             <a:avLst>
-              <a:gd name="adj" fmla="val 8889"/>
-            </a:avLst>
-          </a:prstGeom>
-          <a:solidFill>
-            <a:schemeClr val="tx1"/>
-          </a:solidFill>
-          <a:ln w="12700">
-            <a:solidFill>
-              <a:schemeClr val="tx1"/>
-            </a:solidFill>
-            <a:prstDash val="solid"/>
-          </a:ln>
-          <a:effectLst>
-            <a:outerShdw sx="100000" sy="100000" kx="0" ky="0" algn="bl" rotWithShape="0" blurRad="76200" dist="25400" dir="5400000">
-              <a:srgbClr val="94A3B8">
-                <a:alpha val="25000"/>
-              </a:srgbClr>
-            </a:outerShdw>
-          </a:effectLst>
-        </p:spPr>
-      </p:sp>
-      <p:sp>
-        <p:nvSpPr>
-          <p:cNvPr id="8" name="Flow 2 head"/>
-          <p:cNvSpPr txBox="1"/>
-          <p:nvPr/>
-        </p:nvSpPr>
-        <p:spPr>
-          <a:xfrm>
-            <a:off x="3291840" y="1115568"/>
-            <a:ext cx="2468880" cy="274320"/>
-          </a:xfrm>
-          <a:prstGeom prst="rect">
-            <a:avLst/>
-          </a:prstGeom>
-          <a:noFill/>
-          <a:ln/>
-        </p:spPr>
-        <p:txBody>
-          <a:bodyPr wrap="square" lIns="0" tIns="0" rIns="0" bIns="0" rtlCol="0" anchor="ctr"/>
-          <a:lstStyle/>
-          <a:p>
-            <a:pPr indent="0" marL="0">
-              <a:buNone/>
-            </a:pPr>
-            <a:r>
-              <a:rPr lang="en-US" sz="1200" b="1" dirty="0">
-                <a:solidFill>
-                  <a:schemeClr val="accent2"/>
-                </a:solidFill>
-              </a:rPr>
-              <a:t>XỬ LÝ (quy tắc trước, AI sau)</a:t>
-            </a:r>
-            <a:endParaRPr lang="en-US" sz="1200" dirty="0"/>
-          </a:p>
-        </p:txBody>
-      </p:sp>
-      <p:sp>
-        <p:nvSpPr>
-          <p:cNvPr id="9" name="Flow 2 body"/>
-          <p:cNvSpPr txBox="1"/>
-          <p:nvPr/>
-        </p:nvSpPr>
-        <p:spPr>
-          <a:xfrm>
-            <a:off x="3291840" y="1417320"/>
-            <a:ext cx="2468880" cy="822960"/>
-          </a:xfrm>
-          <a:prstGeom prst="rect">
-            <a:avLst/>
-          </a:prstGeom>
-          <a:noFill/>
-          <a:ln/>
-        </p:spPr>
-        <p:txBody>
-          <a:bodyPr wrap="square" lIns="0" tIns="0" rIns="0" bIns="0" rtlCol="0" anchor="t"/>
-          <a:lstStyle/>
-          <a:p>
-            <a:pPr indent="0" marL="0">
-              <a:spcAft>
-                <a:spcPts val="200"/>
-              </a:spcAft>
-              <a:buNone/>
-            </a:pPr>
-            <a:r>
-              <a:rPr lang="en-US" sz="1200" dirty="0">
-                <a:solidFill>
-                  <a:schemeClr val="bg1"/>
-                </a:solidFill>
-              </a:rPr>
-              <a:t>1. Kiểm nguồn: thiếu, mờ, khác gốc</a:t>
-            </a:r>
-            <a:endParaRPr lang="en-US" sz="1200" dirty="0"/>
-          </a:p>
-          <a:p>
-            <a:pPr indent="0" marL="0">
-              <a:spcAft>
-                <a:spcPts val="200"/>
-              </a:spcAft>
-              <a:buNone/>
-            </a:pPr>
-            <a:r>
-              <a:rPr lang="en-US" sz="1200" dirty="0">
-                <a:solidFill>
-                  <a:schemeClr val="bg1"/>
-                </a:solidFill>
-              </a:rPr>
-              <a:t>2. 24 quy tắc SOP — không dùng AI</a:t>
-            </a:r>
-            <a:endParaRPr lang="en-US" sz="1200" dirty="0"/>
-          </a:p>
-          <a:p>
-            <a:pPr indent="0" marL="0">
-              <a:spcAft>
-                <a:spcPts val="200"/>
-              </a:spcAft>
-              <a:buNone/>
-            </a:pPr>
-            <a:r>
-              <a:rPr lang="en-US" sz="1200" dirty="0">
-                <a:solidFill>
-                  <a:schemeClr val="bg1"/>
-                </a:solidFill>
-              </a:rPr>
-              <a:t>3. Phân nhóm dừng + câu hỏi một câu</a:t>
-            </a:r>
-            <a:endParaRPr lang="en-US" sz="1200" dirty="0"/>
-          </a:p>
-        </p:txBody>
-      </p:sp>
-      <p:sp>
-        <p:nvSpPr>
-          <p:cNvPr id="10" name="Flow arrow 2"/>
-          <p:cNvSpPr/>
-          <p:nvPr/>
-        </p:nvSpPr>
-        <p:spPr>
-          <a:xfrm>
-            <a:off x="5943600" y="1527048"/>
-            <a:ext cx="228600" cy="274320"/>
-          </a:xfrm>
-          <a:prstGeom prst="rightArrow">
-            <a:avLst/>
-          </a:prstGeom>
-          <a:solidFill>
-            <a:schemeClr val="tx2"/>
-          </a:solidFill>
-          <a:ln w="12700">
-            <a:solidFill>
-              <a:schemeClr val="tx2"/>
-            </a:solidFill>
-            <a:prstDash val="solid"/>
-          </a:ln>
-        </p:spPr>
-      </p:sp>
-      <p:sp>
-        <p:nvSpPr>
-          <p:cNvPr id="11" name="Flow 3"/>
-          <p:cNvSpPr/>
-          <p:nvPr/>
-        </p:nvSpPr>
-        <p:spPr>
-          <a:xfrm>
-            <a:off x="6172200" y="1051560"/>
-            <a:ext cx="2514600" cy="1234440"/>
-          </a:xfrm>
-          <a:prstGeom prst="roundRect">
-            <a:avLst>
-              <a:gd name="adj" fmla="val 8889"/>
+              <a:gd name="adj" fmla="val 7143"/>
             </a:avLst>
           </a:prstGeom>
           <a:solidFill>
@@ -2705,14 +2613,39 @@
       </p:sp>
       <p:sp>
         <p:nvSpPr>
-          <p:cNvPr id="12" name="Flow 3 head"/>
+          <p:cNvPr id="11" name="Group 2 badge"/>
+          <p:cNvSpPr/>
+          <p:nvPr/>
+        </p:nvSpPr>
+        <p:spPr>
+          <a:xfrm>
+            <a:off x="3383280" y="2596896"/>
+            <a:ext cx="384048" cy="384048"/>
+          </a:xfrm>
+          <a:prstGeom prst="ellipse">
+            <a:avLst/>
+          </a:prstGeom>
+          <a:solidFill>
+            <a:schemeClr val="accent4"/>
+          </a:solidFill>
+          <a:ln w="12700">
+            <a:solidFill>
+              <a:schemeClr val="accent4"/>
+            </a:solidFill>
+            <a:prstDash val="solid"/>
+          </a:ln>
+        </p:spPr>
+      </p:sp>
+      <p:sp>
+        <p:nvSpPr>
+          <p:cNvPr id="12" name="Group 2 badge text"/>
           <p:cNvSpPr txBox="1"/>
           <p:nvPr/>
         </p:nvSpPr>
         <p:spPr>
           <a:xfrm>
-            <a:off x="6309360" y="1115568"/>
-            <a:ext cx="2240280" cy="274320"/>
+            <a:off x="3383280" y="2596896"/>
+            <a:ext cx="384048" cy="384048"/>
           </a:xfrm>
           <a:prstGeom prst="rect">
             <a:avLst/>
@@ -2724,16 +2657,88 @@
           <a:bodyPr wrap="square" lIns="0" tIns="0" rIns="0" bIns="0" rtlCol="0" anchor="ctr"/>
           <a:lstStyle/>
           <a:p>
+            <a:pPr algn="ctr" indent="0" marL="0">
+              <a:buNone/>
+            </a:pPr>
+            <a:r>
+              <a:rPr lang="en-US" sz="1300" b="1" dirty="0">
+                <a:solidFill>
+                  <a:schemeClr val="bg1"/>
+                </a:solidFill>
+              </a:rPr>
+              <a:t>2</a:t>
+            </a:r>
+            <a:endParaRPr lang="en-US" sz="1300" dirty="0"/>
+          </a:p>
+        </p:txBody>
+      </p:sp>
+      <p:sp>
+        <p:nvSpPr>
+          <p:cNvPr id="13" name="Group 2 label"/>
+          <p:cNvSpPr txBox="1"/>
+          <p:nvPr/>
+        </p:nvSpPr>
+        <p:spPr>
+          <a:xfrm>
+            <a:off x="3840480" y="2596896"/>
+            <a:ext cx="1463040" cy="384048"/>
+          </a:xfrm>
+          <a:prstGeom prst="rect">
+            <a:avLst/>
+          </a:prstGeom>
+          <a:noFill/>
+          <a:ln/>
+        </p:spPr>
+        <p:txBody>
+          <a:bodyPr wrap="square" lIns="0" tIns="0" rIns="0" bIns="0" rtlCol="0" anchor="ctr"/>
+          <a:lstStyle/>
+          <a:p>
             <a:pPr indent="0" marL="0">
+              <a:buNone/>
+            </a:pPr>
+            <a:r>
+              <a:rPr lang="en-US" sz="1400" b="1" dirty="0">
+                <a:solidFill>
+                  <a:schemeClr val="accent4"/>
+                </a:solidFill>
+              </a:rPr>
+              <a:t>Ngoài quy định</a:t>
+            </a:r>
+            <a:endParaRPr lang="en-US" sz="1400" dirty="0"/>
+          </a:p>
+        </p:txBody>
+      </p:sp>
+      <p:sp>
+        <p:nvSpPr>
+          <p:cNvPr id="14" name="Group 2 recipient"/>
+          <p:cNvSpPr txBox="1"/>
+          <p:nvPr/>
+        </p:nvSpPr>
+        <p:spPr>
+          <a:xfrm>
+            <a:off x="5212080" y="2596896"/>
+            <a:ext cx="548640" cy="384048"/>
+          </a:xfrm>
+          <a:prstGeom prst="rect">
+            <a:avLst/>
+          </a:prstGeom>
+          <a:noFill/>
+          <a:ln/>
+        </p:spPr>
+        <p:txBody>
+          <a:bodyPr wrap="square" lIns="0" tIns="0" rIns="0" bIns="0" rtlCol="0" anchor="ctr"/>
+          <a:lstStyle/>
+          <a:p>
+            <a:pPr algn="r" indent="0" marL="0">
               <a:buNone/>
             </a:pPr>
             <a:r>
               <a:rPr lang="en-US" sz="1200" b="1" dirty="0">
                 <a:solidFill>
-                  <a:schemeClr val="accent1"/>
+                  <a:schemeClr val="tx2"/>
                 </a:solidFill>
               </a:rPr>
-              <a:t>ĐẦU RA</a:t>
+              <a:t>→ KTT</a:t>
             </a:r>
             <a:endParaRPr lang="en-US" sz="1200" dirty="0"/>
           </a:p>
@@ -2741,14 +2746,14 @@
       </p:sp>
       <p:sp>
         <p:nvSpPr>
-          <p:cNvPr id="13" name="Flow 3 body"/>
+          <p:cNvPr id="15" name="Group 2 question"/>
           <p:cNvSpPr txBox="1"/>
           <p:nvPr/>
         </p:nvSpPr>
         <p:spPr>
           <a:xfrm>
-            <a:off x="6309360" y="1417320"/>
-            <a:ext cx="2240280" cy="822960"/>
+            <a:off x="3383280" y="3035808"/>
+            <a:ext cx="2377440" cy="914400"/>
           </a:xfrm>
           <a:prstGeom prst="rect">
             <a:avLst/>
@@ -2761,54 +2766,34 @@
           <a:lstStyle/>
           <a:p>
             <a:pPr indent="0" marL="0">
-              <a:spcAft>
-                <a:spcPts val="200"/>
-              </a:spcAft>
               <a:buNone/>
             </a:pPr>
             <a:r>
-              <a:rPr lang="en-US" sz="1200" dirty="0">
+              <a:rPr lang="en-US" sz="1150" i="1" dirty="0">
                 <a:solidFill>
                   <a:schemeClr val="tx1"/>
                 </a:solidFill>
               </a:rPr>
-              <a:t>Tự xử lý: duyệt thuế + nhật ký</a:t>
+              <a:t>“Tiếp khách có rượu vang 3.300.000₫. A: Theo quy chế — khấu trừ 300.000₫; hay B: Chi cá nhân — loại 300.000₫ VAT?”</a:t>
             </a:r>
-            <a:endParaRPr lang="en-US" sz="1200" dirty="0"/>
-          </a:p>
-          <a:p>
-            <a:pPr indent="0" marL="0">
-              <a:spcAft>
-                <a:spcPts val="200"/>
-              </a:spcAft>
-              <a:buNone/>
-            </a:pPr>
-            <a:r>
-              <a:rPr lang="en-US" sz="1200" dirty="0">
-                <a:solidFill>
-                  <a:schemeClr val="tx1"/>
-                </a:solidFill>
-              </a:rPr>
-              <a:t>Chuyển tiếp: 1 câu hỏi, đúng người</a:t>
-            </a:r>
-            <a:endParaRPr lang="en-US" sz="1200" dirty="0"/>
+            <a:endParaRPr lang="en-US" sz="1150" dirty="0"/>
           </a:p>
         </p:txBody>
       </p:sp>
       <p:sp>
         <p:nvSpPr>
-          <p:cNvPr id="14" name="Group card 1"/>
+          <p:cNvPr id="16" name="Group card 3"/>
           <p:cNvSpPr/>
           <p:nvPr/>
         </p:nvSpPr>
         <p:spPr>
           <a:xfrm>
-            <a:off x="457200" y="2468880"/>
-            <a:ext cx="2651760" cy="1600200"/>
+            <a:off x="6035040" y="2487168"/>
+            <a:ext cx="2651760" cy="1536192"/>
           </a:xfrm>
           <a:prstGeom prst="roundRect">
             <a:avLst>
-              <a:gd name="adj" fmla="val 6857"/>
+              <a:gd name="adj" fmla="val 7143"/>
             </a:avLst>
           </a:prstGeom>
           <a:solidFill>
@@ -2831,419 +2816,13 @@
       </p:sp>
       <p:sp>
         <p:nvSpPr>
-          <p:cNvPr id="15" name="Group 1 badge"/>
+          <p:cNvPr id="17" name="Group 3 badge"/>
           <p:cNvSpPr/>
           <p:nvPr/>
         </p:nvSpPr>
         <p:spPr>
           <a:xfrm>
-            <a:off x="594360" y="2578608"/>
-            <a:ext cx="384048" cy="384048"/>
-          </a:xfrm>
-          <a:prstGeom prst="ellipse">
-            <a:avLst/>
-          </a:prstGeom>
-          <a:solidFill>
-            <a:schemeClr val="accent3"/>
-          </a:solidFill>
-          <a:ln w="12700">
-            <a:solidFill>
-              <a:schemeClr val="accent3"/>
-            </a:solidFill>
-            <a:prstDash val="solid"/>
-          </a:ln>
-        </p:spPr>
-      </p:sp>
-      <p:sp>
-        <p:nvSpPr>
-          <p:cNvPr id="16" name="Group 1 badge text"/>
-          <p:cNvSpPr txBox="1"/>
-          <p:nvPr/>
-        </p:nvSpPr>
-        <p:spPr>
-          <a:xfrm>
-            <a:off x="594360" y="2578608"/>
-            <a:ext cx="384048" cy="384048"/>
-          </a:xfrm>
-          <a:prstGeom prst="rect">
-            <a:avLst/>
-          </a:prstGeom>
-          <a:noFill/>
-          <a:ln/>
-        </p:spPr>
-        <p:txBody>
-          <a:bodyPr wrap="square" lIns="0" tIns="0" rIns="0" bIns="0" rtlCol="0" anchor="ctr"/>
-          <a:lstStyle/>
-          <a:p>
-            <a:pPr algn="ctr" indent="0" marL="0">
-              <a:buNone/>
-            </a:pPr>
-            <a:r>
-              <a:rPr lang="en-US" sz="1300" b="1" dirty="0">
-                <a:solidFill>
-                  <a:schemeClr val="bg1"/>
-                </a:solidFill>
-              </a:rPr>
-              <a:t>1</a:t>
-            </a:r>
-            <a:endParaRPr lang="en-US" sz="1300" dirty="0"/>
-          </a:p>
-        </p:txBody>
-      </p:sp>
-      <p:sp>
-        <p:nvSpPr>
-          <p:cNvPr id="17" name="Group 1 label"/>
-          <p:cNvSpPr txBox="1"/>
-          <p:nvPr/>
-        </p:nvSpPr>
-        <p:spPr>
-          <a:xfrm>
-            <a:off x="1051560" y="2578608"/>
-            <a:ext cx="1463040" cy="384048"/>
-          </a:xfrm>
-          <a:prstGeom prst="rect">
-            <a:avLst/>
-          </a:prstGeom>
-          <a:noFill/>
-          <a:ln/>
-        </p:spPr>
-        <p:txBody>
-          <a:bodyPr wrap="square" lIns="0" tIns="0" rIns="0" bIns="0" rtlCol="0" anchor="ctr"/>
-          <a:lstStyle/>
-          <a:p>
-            <a:pPr indent="0" marL="0">
-              <a:buNone/>
-            </a:pPr>
-            <a:r>
-              <a:rPr lang="en-US" sz="1400" b="1" dirty="0">
-                <a:solidFill>
-                  <a:schemeClr val="accent3"/>
-                </a:solidFill>
-              </a:rPr>
-              <a:t>Chưa rõ thông tin</a:t>
-            </a:r>
-            <a:endParaRPr lang="en-US" sz="1400" dirty="0"/>
-          </a:p>
-        </p:txBody>
-      </p:sp>
-      <p:sp>
-        <p:nvSpPr>
-          <p:cNvPr id="18" name="Group 1 recipient"/>
-          <p:cNvSpPr txBox="1"/>
-          <p:nvPr/>
-        </p:nvSpPr>
-        <p:spPr>
-          <a:xfrm>
-            <a:off x="2423160" y="2578608"/>
-            <a:ext cx="548640" cy="384048"/>
-          </a:xfrm>
-          <a:prstGeom prst="rect">
-            <a:avLst/>
-          </a:prstGeom>
-          <a:noFill/>
-          <a:ln/>
-        </p:spPr>
-        <p:txBody>
-          <a:bodyPr wrap="square" lIns="0" tIns="0" rIns="0" bIns="0" rtlCol="0" anchor="ctr"/>
-          <a:lstStyle/>
-          <a:p>
-            <a:pPr algn="r" indent="0" marL="0">
-              <a:buNone/>
-            </a:pPr>
-            <a:r>
-              <a:rPr lang="en-US" sz="1200" b="1" dirty="0">
-                <a:solidFill>
-                  <a:schemeClr val="tx2"/>
-                </a:solidFill>
-              </a:rPr>
-              <a:t>→ KTT</a:t>
-            </a:r>
-            <a:endParaRPr lang="en-US" sz="1200" dirty="0"/>
-          </a:p>
-        </p:txBody>
-      </p:sp>
-      <p:sp>
-        <p:nvSpPr>
-          <p:cNvPr id="19" name="Group 1 question"/>
-          <p:cNvSpPr txBox="1"/>
-          <p:nvPr/>
-        </p:nvSpPr>
-        <p:spPr>
-          <a:xfrm>
-            <a:off x="594360" y="3035808"/>
-            <a:ext cx="2377440" cy="960120"/>
-          </a:xfrm>
-          <a:prstGeom prst="rect">
-            <a:avLst/>
-          </a:prstGeom>
-          <a:noFill/>
-          <a:ln/>
-        </p:spPr>
-        <p:txBody>
-          <a:bodyPr wrap="square" lIns="0" tIns="0" rIns="0" bIns="0" rtlCol="0" anchor="t"/>
-          <a:lstStyle/>
-          <a:p>
-            <a:pPr indent="0" marL="0">
-              <a:buNone/>
-            </a:pPr>
-            <a:r>
-              <a:rPr lang="en-US" sz="1200" i="1" dirty="0">
-                <a:solidFill>
-                  <a:schemeClr val="tx1"/>
-                </a:solidFill>
-              </a:rPr>
-              <a:t>“Tổng in 480.000₫ lệch tiền hàng + thuế = 495.000₫. A: 495.000₫ — sửa; hay B: 480.000₫ — yêu cầu NCC điều chỉnh?”</a:t>
-            </a:r>
-            <a:endParaRPr lang="en-US" sz="1200" dirty="0"/>
-          </a:p>
-        </p:txBody>
-      </p:sp>
-      <p:sp>
-        <p:nvSpPr>
-          <p:cNvPr id="20" name="Group card 2"/>
-          <p:cNvSpPr/>
-          <p:nvPr/>
-        </p:nvSpPr>
-        <p:spPr>
-          <a:xfrm>
-            <a:off x="3246120" y="2468880"/>
-            <a:ext cx="2651760" cy="1600200"/>
-          </a:xfrm>
-          <a:prstGeom prst="roundRect">
-            <a:avLst>
-              <a:gd name="adj" fmla="val 6857"/>
-            </a:avLst>
-          </a:prstGeom>
-          <a:solidFill>
-            <a:schemeClr val="bg2"/>
-          </a:solidFill>
-          <a:ln w="12700">
-            <a:solidFill>
-              <a:schemeClr val="bg2"/>
-            </a:solidFill>
-            <a:prstDash val="solid"/>
-          </a:ln>
-          <a:effectLst>
-            <a:outerShdw sx="100000" sy="100000" kx="0" ky="0" algn="bl" rotWithShape="0" blurRad="76200" dist="25400" dir="5400000">
-              <a:srgbClr val="94A3B8">
-                <a:alpha val="25000"/>
-              </a:srgbClr>
-            </a:outerShdw>
-          </a:effectLst>
-        </p:spPr>
-      </p:sp>
-      <p:sp>
-        <p:nvSpPr>
-          <p:cNvPr id="21" name="Group 2 badge"/>
-          <p:cNvSpPr/>
-          <p:nvPr/>
-        </p:nvSpPr>
-        <p:spPr>
-          <a:xfrm>
-            <a:off x="3383280" y="2578608"/>
-            <a:ext cx="384048" cy="384048"/>
-          </a:xfrm>
-          <a:prstGeom prst="ellipse">
-            <a:avLst/>
-          </a:prstGeom>
-          <a:solidFill>
-            <a:schemeClr val="accent4"/>
-          </a:solidFill>
-          <a:ln w="12700">
-            <a:solidFill>
-              <a:schemeClr val="accent4"/>
-            </a:solidFill>
-            <a:prstDash val="solid"/>
-          </a:ln>
-        </p:spPr>
-      </p:sp>
-      <p:sp>
-        <p:nvSpPr>
-          <p:cNvPr id="22" name="Group 2 badge text"/>
-          <p:cNvSpPr txBox="1"/>
-          <p:nvPr/>
-        </p:nvSpPr>
-        <p:spPr>
-          <a:xfrm>
-            <a:off x="3383280" y="2578608"/>
-            <a:ext cx="384048" cy="384048"/>
-          </a:xfrm>
-          <a:prstGeom prst="rect">
-            <a:avLst/>
-          </a:prstGeom>
-          <a:noFill/>
-          <a:ln/>
-        </p:spPr>
-        <p:txBody>
-          <a:bodyPr wrap="square" lIns="0" tIns="0" rIns="0" bIns="0" rtlCol="0" anchor="ctr"/>
-          <a:lstStyle/>
-          <a:p>
-            <a:pPr algn="ctr" indent="0" marL="0">
-              <a:buNone/>
-            </a:pPr>
-            <a:r>
-              <a:rPr lang="en-US" sz="1300" b="1" dirty="0">
-                <a:solidFill>
-                  <a:schemeClr val="bg1"/>
-                </a:solidFill>
-              </a:rPr>
-              <a:t>2</a:t>
-            </a:r>
-            <a:endParaRPr lang="en-US" sz="1300" dirty="0"/>
-          </a:p>
-        </p:txBody>
-      </p:sp>
-      <p:sp>
-        <p:nvSpPr>
-          <p:cNvPr id="23" name="Group 2 label"/>
-          <p:cNvSpPr txBox="1"/>
-          <p:nvPr/>
-        </p:nvSpPr>
-        <p:spPr>
-          <a:xfrm>
-            <a:off x="3840480" y="2578608"/>
-            <a:ext cx="1463040" cy="384048"/>
-          </a:xfrm>
-          <a:prstGeom prst="rect">
-            <a:avLst/>
-          </a:prstGeom>
-          <a:noFill/>
-          <a:ln/>
-        </p:spPr>
-        <p:txBody>
-          <a:bodyPr wrap="square" lIns="0" tIns="0" rIns="0" bIns="0" rtlCol="0" anchor="ctr"/>
-          <a:lstStyle/>
-          <a:p>
-            <a:pPr indent="0" marL="0">
-              <a:buNone/>
-            </a:pPr>
-            <a:r>
-              <a:rPr lang="en-US" sz="1400" b="1" dirty="0">
-                <a:solidFill>
-                  <a:schemeClr val="accent4"/>
-                </a:solidFill>
-              </a:rPr>
-              <a:t>Ngoài quy định</a:t>
-            </a:r>
-            <a:endParaRPr lang="en-US" sz="1400" dirty="0"/>
-          </a:p>
-        </p:txBody>
-      </p:sp>
-      <p:sp>
-        <p:nvSpPr>
-          <p:cNvPr id="24" name="Group 2 recipient"/>
-          <p:cNvSpPr txBox="1"/>
-          <p:nvPr/>
-        </p:nvSpPr>
-        <p:spPr>
-          <a:xfrm>
-            <a:off x="5212080" y="2578608"/>
-            <a:ext cx="548640" cy="384048"/>
-          </a:xfrm>
-          <a:prstGeom prst="rect">
-            <a:avLst/>
-          </a:prstGeom>
-          <a:noFill/>
-          <a:ln/>
-        </p:spPr>
-        <p:txBody>
-          <a:bodyPr wrap="square" lIns="0" tIns="0" rIns="0" bIns="0" rtlCol="0" anchor="ctr"/>
-          <a:lstStyle/>
-          <a:p>
-            <a:pPr algn="r" indent="0" marL="0">
-              <a:buNone/>
-            </a:pPr>
-            <a:r>
-              <a:rPr lang="en-US" sz="1200" b="1" dirty="0">
-                <a:solidFill>
-                  <a:schemeClr val="tx2"/>
-                </a:solidFill>
-              </a:rPr>
-              <a:t>→ KTT</a:t>
-            </a:r>
-            <a:endParaRPr lang="en-US" sz="1200" dirty="0"/>
-          </a:p>
-        </p:txBody>
-      </p:sp>
-      <p:sp>
-        <p:nvSpPr>
-          <p:cNvPr id="25" name="Group 2 question"/>
-          <p:cNvSpPr txBox="1"/>
-          <p:nvPr/>
-        </p:nvSpPr>
-        <p:spPr>
-          <a:xfrm>
-            <a:off x="3383280" y="3035808"/>
-            <a:ext cx="2377440" cy="960120"/>
-          </a:xfrm>
-          <a:prstGeom prst="rect">
-            <a:avLst/>
-          </a:prstGeom>
-          <a:noFill/>
-          <a:ln/>
-        </p:spPr>
-        <p:txBody>
-          <a:bodyPr wrap="square" lIns="0" tIns="0" rIns="0" bIns="0" rtlCol="0" anchor="t"/>
-          <a:lstStyle/>
-          <a:p>
-            <a:pPr indent="0" marL="0">
-              <a:buNone/>
-            </a:pPr>
-            <a:r>
-              <a:rPr lang="en-US" sz="1200" i="1" dirty="0">
-                <a:solidFill>
-                  <a:schemeClr val="tx1"/>
-                </a:solidFill>
-              </a:rPr>
-              <a:t>“Tiếp khách có rượu vang 3.300.000₫. A: Theo quy chế — khấu trừ 300.000₫; hay B: Chi cá nhân — loại 300.000₫ VAT?”</a:t>
-            </a:r>
-            <a:endParaRPr lang="en-US" sz="1200" dirty="0"/>
-          </a:p>
-        </p:txBody>
-      </p:sp>
-      <p:sp>
-        <p:nvSpPr>
-          <p:cNvPr id="26" name="Group card 3"/>
-          <p:cNvSpPr/>
-          <p:nvPr/>
-        </p:nvSpPr>
-        <p:spPr>
-          <a:xfrm>
-            <a:off x="6035040" y="2468880"/>
-            <a:ext cx="2651760" cy="1600200"/>
-          </a:xfrm>
-          <a:prstGeom prst="roundRect">
-            <a:avLst>
-              <a:gd name="adj" fmla="val 6857"/>
-            </a:avLst>
-          </a:prstGeom>
-          <a:solidFill>
-            <a:schemeClr val="bg2"/>
-          </a:solidFill>
-          <a:ln w="12700">
-            <a:solidFill>
-              <a:schemeClr val="bg2"/>
-            </a:solidFill>
-            <a:prstDash val="solid"/>
-          </a:ln>
-          <a:effectLst>
-            <a:outerShdw sx="100000" sy="100000" kx="0" ky="0" algn="bl" rotWithShape="0" blurRad="76200" dist="25400" dir="5400000">
-              <a:srgbClr val="94A3B8">
-                <a:alpha val="25000"/>
-              </a:srgbClr>
-            </a:outerShdw>
-          </a:effectLst>
-        </p:spPr>
-      </p:sp>
-      <p:sp>
-        <p:nvSpPr>
-          <p:cNvPr id="27" name="Group 3 badge"/>
-          <p:cNvSpPr/>
-          <p:nvPr/>
-        </p:nvSpPr>
-        <p:spPr>
-          <a:xfrm>
-            <a:off x="6172200" y="2578608"/>
+            <a:off x="6172200" y="2596896"/>
             <a:ext cx="384048" cy="384048"/>
           </a:xfrm>
           <a:prstGeom prst="ellipse">
@@ -3262,13 +2841,13 @@
       </p:sp>
       <p:sp>
         <p:nvSpPr>
-          <p:cNvPr id="28" name="Group 3 badge text"/>
+          <p:cNvPr id="18" name="Group 3 badge text"/>
           <p:cNvSpPr txBox="1"/>
           <p:nvPr/>
         </p:nvSpPr>
         <p:spPr>
           <a:xfrm>
-            <a:off x="6172200" y="2578608"/>
+            <a:off x="6172200" y="2596896"/>
             <a:ext cx="384048" cy="384048"/>
           </a:xfrm>
           <a:prstGeom prst="rect">
@@ -3298,13 +2877,13 @@
       </p:sp>
       <p:sp>
         <p:nvSpPr>
-          <p:cNvPr id="29" name="Group 3 label"/>
+          <p:cNvPr id="19" name="Group 3 label"/>
           <p:cNvSpPr txBox="1"/>
           <p:nvPr/>
         </p:nvSpPr>
         <p:spPr>
           <a:xfrm>
-            <a:off x="6629400" y="2578608"/>
+            <a:off x="6629400" y="2596896"/>
             <a:ext cx="1463040" cy="384048"/>
           </a:xfrm>
           <a:prstGeom prst="rect">
@@ -3334,13 +2913,13 @@
       </p:sp>
       <p:sp>
         <p:nvSpPr>
-          <p:cNvPr id="30" name="Group 3 recipient"/>
+          <p:cNvPr id="20" name="Group 3 recipient"/>
           <p:cNvSpPr txBox="1"/>
           <p:nvPr/>
         </p:nvSpPr>
         <p:spPr>
           <a:xfrm>
-            <a:off x="8001000" y="2578608"/>
+            <a:off x="8001000" y="2596896"/>
             <a:ext cx="548640" cy="384048"/>
           </a:xfrm>
           <a:prstGeom prst="rect">
@@ -3370,14 +2949,14 @@
       </p:sp>
       <p:sp>
         <p:nvSpPr>
-          <p:cNvPr id="31" name="Group 3 question"/>
+          <p:cNvPr id="21" name="Group 3 question"/>
           <p:cNvSpPr txBox="1"/>
           <p:nvPr/>
         </p:nvSpPr>
         <p:spPr>
           <a:xfrm>
             <a:off x="6172200" y="3035808"/>
-            <a:ext cx="2377440" cy="960120"/>
+            <a:ext cx="2377440" cy="914400"/>
           </a:xfrm>
           <a:prstGeom prst="rect">
             <a:avLst/>
@@ -3393,20 +2972,20 @@
               <a:buNone/>
             </a:pPr>
             <a:r>
-              <a:rPr lang="en-US" sz="1200" i="1" dirty="0">
+              <a:rPr lang="en-US" sz="1150" i="1" dirty="0">
                 <a:solidFill>
                   <a:schemeClr val="tx1"/>
                 </a:solidFill>
               </a:rPr>
               <a:t>“330.000.000₫ ≥ hạn mức KTT 200.000.000₫. A: CFO duyệt, khấu trừ 30.000.000₫; hay B: Tạm dừng thẩm tra hợp đồng?”</a:t>
             </a:r>
-            <a:endParaRPr lang="en-US" sz="1200" dirty="0"/>
+            <a:endParaRPr lang="en-US" sz="1150" dirty="0"/>
           </a:p>
         </p:txBody>
       </p:sp>
       <p:sp>
         <p:nvSpPr>
-          <p:cNvPr id="32" name="Human decision line"/>
+          <p:cNvPr id="22" name="Human decision line"/>
           <p:cNvSpPr txBox="1"/>
           <p:nvPr/>
         </p:nvSpPr>
@@ -4452,503 +4031,39 @@
                 <a:ea typeface="Cambria" pitchFamily="34" charset="-122"/>
                 <a:cs typeface="Cambria" pitchFamily="34" charset="-120"/>
               </a:rPr>
-              <a:t>Kiến trúc: thành phần thật và giả lập</a:t>
+              <a:t>Kiến trúc &amp; công nghệ: thật và giả lập</a:t>
             </a:r>
             <a:endParaRPr lang="en-US" sz="3000" dirty="0"/>
           </a:p>
         </p:txBody>
       </p:sp>
-      <p:sp>
-        <p:nvSpPr>
-          <p:cNvPr id="3" name="Arch 1"/>
-          <p:cNvSpPr/>
+      <p:pic>
+        <p:nvPicPr>
+          <p:cNvPr id="3" name="Architecture diagram" descr="D:/TAX_MLAI/docs/diagrams/s3-architecture-slide.png">    </p:cNvPr>
+          <p:cNvPicPr>
+            <a:picLocks noChangeAspect="1"/>
+          </p:cNvPicPr>
           <p:nvPr/>
-        </p:nvSpPr>
-        <p:spPr>
-          <a:xfrm>
-            <a:off x="457200" y="1051560"/>
-            <a:ext cx="3291840" cy="594360"/>
-          </a:xfrm>
-          <a:prstGeom prst="roundRect">
-            <a:avLst>
-              <a:gd name="adj" fmla="val 18462"/>
-            </a:avLst>
-          </a:prstGeom>
-          <a:solidFill>
-            <a:schemeClr val="bg2"/>
-          </a:solidFill>
-          <a:ln w="12700">
-            <a:solidFill>
-              <a:schemeClr val="bg2"/>
-            </a:solidFill>
-            <a:prstDash val="solid"/>
-          </a:ln>
-          <a:effectLst>
-            <a:outerShdw sx="100000" sy="100000" kx="0" ky="0" algn="bl" rotWithShape="0" blurRad="76200" dist="25400" dir="5400000">
-              <a:srgbClr val="94A3B8">
-                <a:alpha val="25000"/>
-              </a:srgbClr>
-            </a:outerShdw>
-          </a:effectLst>
-        </p:spPr>
-      </p:sp>
-      <p:sp>
-        <p:nvSpPr>
-          <p:cNvPr id="4" name="Arch 1 text"/>
-          <p:cNvSpPr txBox="1"/>
-          <p:nvPr/>
-        </p:nvSpPr>
-        <p:spPr>
-          <a:xfrm>
-            <a:off x="594360" y="1088136"/>
-            <a:ext cx="3017520" cy="530352"/>
+        </p:nvPicPr>
+        <p:blipFill>
+          <a:blip r:embed="rId1"/>
+          <a:stretch>
+            <a:fillRect/>
+          </a:stretch>
+        </p:blipFill>
+        <p:spPr>
+          <a:xfrm>
+            <a:off x="365760" y="1143000"/>
+            <a:ext cx="3977640" cy="2482448"/>
           </a:xfrm>
           <a:prstGeom prst="rect">
             <a:avLst/>
           </a:prstGeom>
-          <a:noFill/>
-          <a:ln/>
-        </p:spPr>
-        <p:txBody>
-          <a:bodyPr wrap="square" lIns="0" tIns="0" rIns="0" bIns="0" rtlCol="0" anchor="ctr"/>
-          <a:lstStyle/>
-          <a:p>
-            <a:pPr indent="0" marL="0">
-              <a:buNone/>
-            </a:pPr>
-            <a:r>
-              <a:rPr lang="en-US" sz="1300" b="1" dirty="0">
-                <a:solidFill>
-                  <a:schemeClr val="tx1"/>
-                </a:solidFill>
-              </a:rPr>
-              <a:t>Trình duyệt · giám khảo</a:t>
-            </a:r>
-            <a:endParaRPr lang="en-US" sz="1300" dirty="0"/>
-          </a:p>
-          <a:p>
-            <a:pPr indent="0" marL="0">
-              <a:buNone/>
-            </a:pPr>
-            <a:r>
-              <a:rPr lang="en-US" sz="1100" dirty="0">
-                <a:solidFill>
-                  <a:schemeClr val="tx1"/>
-                </a:solidFill>
-              </a:rPr>
-              <a:t>Live URL, không cần tài khoản; demo riêng mỗi phiên</a:t>
-            </a:r>
-            <a:endParaRPr lang="en-US" sz="1300" dirty="0"/>
-          </a:p>
-        </p:txBody>
-      </p:sp>
-      <p:sp>
-        <p:nvSpPr>
-          <p:cNvPr id="5" name="Arch arrow 1"/>
-          <p:cNvSpPr/>
-          <p:nvPr/>
-        </p:nvSpPr>
-        <p:spPr>
-          <a:xfrm>
-            <a:off x="1993392" y="1655064"/>
-            <a:ext cx="219456" cy="118872"/>
-          </a:xfrm>
-          <a:prstGeom prst="downArrow">
-            <a:avLst/>
-          </a:prstGeom>
-          <a:solidFill>
-            <a:schemeClr val="tx2"/>
-          </a:solidFill>
-          <a:ln w="12700">
-            <a:solidFill>
-              <a:schemeClr val="tx2"/>
-            </a:solidFill>
-            <a:prstDash val="solid"/>
-          </a:ln>
-        </p:spPr>
-      </p:sp>
-      <p:sp>
-        <p:nvSpPr>
-          <p:cNvPr id="6" name="Arch 2"/>
-          <p:cNvSpPr/>
-          <p:nvPr/>
-        </p:nvSpPr>
-        <p:spPr>
-          <a:xfrm>
-            <a:off x="457200" y="1783080"/>
-            <a:ext cx="3291840" cy="594360"/>
-          </a:xfrm>
-          <a:prstGeom prst="roundRect">
-            <a:avLst>
-              <a:gd name="adj" fmla="val 18462"/>
-            </a:avLst>
-          </a:prstGeom>
-          <a:solidFill>
-            <a:schemeClr val="bg2"/>
-          </a:solidFill>
-          <a:ln w="12700">
-            <a:solidFill>
-              <a:schemeClr val="bg2"/>
-            </a:solidFill>
-            <a:prstDash val="solid"/>
-          </a:ln>
-          <a:effectLst>
-            <a:outerShdw sx="100000" sy="100000" kx="0" ky="0" algn="bl" rotWithShape="0" blurRad="76200" dist="25400" dir="5400000">
-              <a:srgbClr val="94A3B8">
-                <a:alpha val="25000"/>
-              </a:srgbClr>
-            </a:outerShdw>
-          </a:effectLst>
-        </p:spPr>
-      </p:sp>
-      <p:sp>
-        <p:nvSpPr>
-          <p:cNvPr id="7" name="Arch 2 text"/>
-          <p:cNvSpPr txBox="1"/>
-          <p:nvPr/>
-        </p:nvSpPr>
-        <p:spPr>
-          <a:xfrm>
-            <a:off x="594360" y="1819656"/>
-            <a:ext cx="3017520" cy="530352"/>
-          </a:xfrm>
-          <a:prstGeom prst="rect">
-            <a:avLst/>
-          </a:prstGeom>
-          <a:noFill/>
-          <a:ln/>
-        </p:spPr>
-        <p:txBody>
-          <a:bodyPr wrap="square" lIns="0" tIns="0" rIns="0" bIns="0" rtlCol="0" anchor="ctr"/>
-          <a:lstStyle/>
-          <a:p>
-            <a:pPr indent="0" marL="0">
-              <a:buNone/>
-            </a:pPr>
-            <a:r>
-              <a:rPr lang="en-US" sz="1300" b="1" dirty="0">
-                <a:solidFill>
-                  <a:schemeClr val="tx1"/>
-                </a:solidFill>
-              </a:rPr>
-              <a:t>Next.js API</a:t>
-            </a:r>
-            <a:endParaRPr lang="en-US" sz="1300" dirty="0"/>
-          </a:p>
-          <a:p>
-            <a:pPr indent="0" marL="0">
-              <a:buNone/>
-            </a:pPr>
-            <a:r>
-              <a:rPr lang="en-US" sz="1100" dirty="0">
-                <a:solidFill>
-                  <a:schemeClr val="tx1"/>
-                </a:solidFill>
-              </a:rPr>
-              <a:t>Tiếp nhận · đánh giá · duyệt · dừng · hoàn tác</a:t>
-            </a:r>
-            <a:endParaRPr lang="en-US" sz="1300" dirty="0"/>
-          </a:p>
-        </p:txBody>
-      </p:sp>
-      <p:sp>
-        <p:nvSpPr>
-          <p:cNvPr id="8" name="Arch arrow 2"/>
-          <p:cNvSpPr/>
-          <p:nvPr/>
-        </p:nvSpPr>
-        <p:spPr>
-          <a:xfrm>
-            <a:off x="1993392" y="2386584"/>
-            <a:ext cx="219456" cy="118872"/>
-          </a:xfrm>
-          <a:prstGeom prst="downArrow">
-            <a:avLst/>
-          </a:prstGeom>
-          <a:solidFill>
-            <a:schemeClr val="tx2"/>
-          </a:solidFill>
-          <a:ln w="12700">
-            <a:solidFill>
-              <a:schemeClr val="tx2"/>
-            </a:solidFill>
-            <a:prstDash val="solid"/>
-          </a:ln>
-        </p:spPr>
-      </p:sp>
-      <p:sp>
-        <p:nvSpPr>
-          <p:cNvPr id="9" name="Arch 3"/>
-          <p:cNvSpPr/>
-          <p:nvPr/>
-        </p:nvSpPr>
-        <p:spPr>
-          <a:xfrm>
-            <a:off x="457200" y="2514600"/>
-            <a:ext cx="3291840" cy="594360"/>
-          </a:xfrm>
-          <a:prstGeom prst="roundRect">
-            <a:avLst>
-              <a:gd name="adj" fmla="val 18462"/>
-            </a:avLst>
-          </a:prstGeom>
-          <a:solidFill>
-            <a:schemeClr val="tx1"/>
-          </a:solidFill>
-          <a:ln w="12700">
-            <a:solidFill>
-              <a:schemeClr val="tx1"/>
-            </a:solidFill>
-            <a:prstDash val="solid"/>
-          </a:ln>
-          <a:effectLst>
-            <a:outerShdw sx="100000" sy="100000" kx="0" ky="0" algn="bl" rotWithShape="0" blurRad="76200" dist="25400" dir="5400000">
-              <a:srgbClr val="94A3B8">
-                <a:alpha val="25000"/>
-              </a:srgbClr>
-            </a:outerShdw>
-          </a:effectLst>
-        </p:spPr>
-      </p:sp>
-      <p:sp>
-        <p:nvSpPr>
-          <p:cNvPr id="10" name="Arch 3 text"/>
-          <p:cNvSpPr txBox="1"/>
-          <p:nvPr/>
-        </p:nvSpPr>
-        <p:spPr>
-          <a:xfrm>
-            <a:off x="594360" y="2551176"/>
-            <a:ext cx="3017520" cy="530352"/>
-          </a:xfrm>
-          <a:prstGeom prst="rect">
-            <a:avLst/>
-          </a:prstGeom>
-          <a:noFill/>
-          <a:ln/>
-        </p:spPr>
-        <p:txBody>
-          <a:bodyPr wrap="square" lIns="0" tIns="0" rIns="0" bIns="0" rtlCol="0" anchor="ctr"/>
-          <a:lstStyle/>
-          <a:p>
-            <a:pPr indent="0" marL="0">
-              <a:buNone/>
-            </a:pPr>
-            <a:r>
-              <a:rPr lang="en-US" sz="1300" b="1" dirty="0">
-                <a:solidFill>
-                  <a:schemeClr val="bg1"/>
-                </a:solidFill>
-              </a:rPr>
-              <a:t>Policy engine — 24 quy tắc SOP</a:t>
-            </a:r>
-            <a:endParaRPr lang="en-US" sz="1300" dirty="0"/>
-          </a:p>
-          <a:p>
-            <a:pPr indent="0" marL="0">
-              <a:buNone/>
-            </a:pPr>
-            <a:r>
-              <a:rPr lang="en-US" sz="1100" dirty="0">
-                <a:solidFill>
-                  <a:schemeClr val="bg1"/>
-                </a:solidFill>
-              </a:rPr>
-              <a:t>Tất định, 1 bảng phân loại 3 nhóm dừng</a:t>
-            </a:r>
-            <a:endParaRPr lang="en-US" sz="1300" dirty="0"/>
-          </a:p>
-        </p:txBody>
-      </p:sp>
-      <p:sp>
-        <p:nvSpPr>
-          <p:cNvPr id="11" name="Arch arrow 3"/>
-          <p:cNvSpPr/>
-          <p:nvPr/>
-        </p:nvSpPr>
-        <p:spPr>
-          <a:xfrm>
-            <a:off x="1993392" y="3118104"/>
-            <a:ext cx="219456" cy="118872"/>
-          </a:xfrm>
-          <a:prstGeom prst="downArrow">
-            <a:avLst/>
-          </a:prstGeom>
-          <a:solidFill>
-            <a:schemeClr val="tx2"/>
-          </a:solidFill>
-          <a:ln w="12700">
-            <a:solidFill>
-              <a:schemeClr val="tx2"/>
-            </a:solidFill>
-            <a:prstDash val="solid"/>
-          </a:ln>
-        </p:spPr>
-      </p:sp>
-      <p:sp>
-        <p:nvSpPr>
-          <p:cNvPr id="12" name="Arch 4"/>
-          <p:cNvSpPr/>
-          <p:nvPr/>
-        </p:nvSpPr>
-        <p:spPr>
-          <a:xfrm>
-            <a:off x="457200" y="3246120"/>
-            <a:ext cx="3291840" cy="594360"/>
-          </a:xfrm>
-          <a:prstGeom prst="roundRect">
-            <a:avLst>
-              <a:gd name="adj" fmla="val 18462"/>
-            </a:avLst>
-          </a:prstGeom>
-          <a:solidFill>
-            <a:schemeClr val="bg2"/>
-          </a:solidFill>
-          <a:ln w="12700">
-            <a:solidFill>
-              <a:schemeClr val="bg2"/>
-            </a:solidFill>
-            <a:prstDash val="solid"/>
-          </a:ln>
-          <a:effectLst>
-            <a:outerShdw sx="100000" sy="100000" kx="0" ky="0" algn="bl" rotWithShape="0" blurRad="76200" dist="25400" dir="5400000">
-              <a:srgbClr val="94A3B8">
-                <a:alpha val="25000"/>
-              </a:srgbClr>
-            </a:outerShdw>
-          </a:effectLst>
-        </p:spPr>
-      </p:sp>
-      <p:sp>
-        <p:nvSpPr>
-          <p:cNvPr id="13" name="Arch 4 text"/>
-          <p:cNvSpPr txBox="1"/>
-          <p:nvPr/>
-        </p:nvSpPr>
-        <p:spPr>
-          <a:xfrm>
-            <a:off x="594360" y="3282696"/>
-            <a:ext cx="3017520" cy="530352"/>
-          </a:xfrm>
-          <a:prstGeom prst="rect">
-            <a:avLst/>
-          </a:prstGeom>
-          <a:noFill/>
-          <a:ln/>
-        </p:spPr>
-        <p:txBody>
-          <a:bodyPr wrap="square" lIns="0" tIns="0" rIns="0" bIns="0" rtlCol="0" anchor="ctr"/>
-          <a:lstStyle/>
-          <a:p>
-            <a:pPr indent="0" marL="0">
-              <a:buNone/>
-            </a:pPr>
-            <a:r>
-              <a:rPr lang="en-US" sz="1300" b="1" dirty="0">
-                <a:solidFill>
-                  <a:schemeClr val="tx1"/>
-                </a:solidFill>
-              </a:rPr>
-              <a:t>SQLite (WAL) + nhật ký nối chuỗi hash</a:t>
-            </a:r>
-            <a:endParaRPr lang="en-US" sz="1300" dirty="0"/>
-          </a:p>
-          <a:p>
-            <a:pPr indent="0" marL="0">
-              <a:buNone/>
-            </a:pPr>
-            <a:r>
-              <a:rPr lang="en-US" sz="1100" dirty="0">
-                <a:solidFill>
-                  <a:schemeClr val="tx1"/>
-                </a:solidFill>
-              </a:rPr>
-              <a:t>Bền qua khởi động lại; chỉ ghi thêm; HMAC tùy chọn</a:t>
-            </a:r>
-            <a:endParaRPr lang="en-US" sz="1300" dirty="0"/>
-          </a:p>
-        </p:txBody>
-      </p:sp>
-      <p:sp>
-        <p:nvSpPr>
-          <p:cNvPr id="14" name="Vision box"/>
-          <p:cNvSpPr/>
-          <p:nvPr/>
-        </p:nvSpPr>
-        <p:spPr>
-          <a:xfrm>
-            <a:off x="457200" y="3977640"/>
-            <a:ext cx="3291840" cy="594360"/>
-          </a:xfrm>
-          <a:prstGeom prst="roundRect">
-            <a:avLst>
-              <a:gd name="adj" fmla="val 18462"/>
-            </a:avLst>
-          </a:prstGeom>
-          <a:solidFill>
-            <a:schemeClr val="bg1"/>
-          </a:solidFill>
-          <a:ln w="15875">
-            <a:solidFill>
-              <a:schemeClr val="accent6"/>
-            </a:solidFill>
-            <a:prstDash val="dash"/>
-          </a:ln>
-        </p:spPr>
-      </p:sp>
-      <p:sp>
-        <p:nvSpPr>
-          <p:cNvPr id="15" name="Vision text"/>
-          <p:cNvSpPr txBox="1"/>
-          <p:nvPr/>
-        </p:nvSpPr>
-        <p:spPr>
-          <a:xfrm>
-            <a:off x="594360" y="4014216"/>
-            <a:ext cx="3017520" cy="530352"/>
-          </a:xfrm>
-          <a:prstGeom prst="rect">
-            <a:avLst/>
-          </a:prstGeom>
-          <a:noFill/>
-          <a:ln/>
-        </p:spPr>
-        <p:txBody>
-          <a:bodyPr wrap="square" lIns="0" tIns="0" rIns="0" bIns="0" rtlCol="0" anchor="ctr"/>
-          <a:lstStyle/>
-          <a:p>
-            <a:pPr indent="0" marL="0">
-              <a:buNone/>
-            </a:pPr>
-            <a:r>
-              <a:rPr lang="en-US" sz="1300" b="1" dirty="0">
-                <a:solidFill>
-                  <a:schemeClr val="accent6"/>
-                </a:solidFill>
-              </a:rPr>
-              <a:t>Gemini 2.5 Flash Vision</a:t>
-            </a:r>
-            <a:endParaRPr lang="en-US" sz="1300" dirty="0"/>
-          </a:p>
-          <a:p>
-            <a:pPr indent="0" marL="0">
-              <a:buNone/>
-            </a:pPr>
-            <a:r>
-              <a:rPr lang="en-US" sz="1100" dirty="0">
-                <a:solidFill>
-                  <a:schemeClr val="accent6"/>
-                </a:solidFill>
-              </a:rPr>
-              <a:t>Chỉ đọc ảnh/PDF scan; không quyết định</a:t>
-            </a:r>
-            <a:endParaRPr lang="en-US" sz="1300" dirty="0"/>
-          </a:p>
-        </p:txBody>
-      </p:sp>
+        </p:spPr>
+      </p:pic>
       <p:graphicFrame>
         <p:nvGraphicFramePr>
-          <p:cNvPr id="5" name="Real vs simulated table"/>
+          <p:cNvPr id="5" name="Tech stack table"/>
           <p:cNvGraphicFramePr>
             <a:graphicFrameLocks noGrp="1"/>
           </p:cNvGraphicFramePr>
@@ -4961,19 +4076,19 @@
           </p:nvPr>
         </p:nvGraphicFramePr>
         <p:xfrm>
-          <a:off x="4023360" y="1051560"/>
-          <a:ext cx="4663440" cy="914400"/>
+          <a:off x="4526280" y="1005840"/>
+          <a:ext cx="4160520" cy="914400"/>
         </p:xfrm>
         <a:graphic>
           <a:graphicData uri="http://schemas.openxmlformats.org/drawingml/2006/table">
             <a:tbl>
               <a:tblPr/>
               <a:tblGrid>
-                <a:gridCol w="868680"/>
-                <a:gridCol w="1874520"/>
-                <a:gridCol w="1920240"/>
+                <a:gridCol w="1188720"/>
+                <a:gridCol w="2377440"/>
+                <a:gridCol w="594360"/>
               </a:tblGrid>
-              <a:tr h="292608">
+              <a:tr h="301752">
                 <a:tc>
                   <a:txBody>
                     <a:bodyPr/>
@@ -4982,11 +4097,19 @@
                       <a:pPr indent="0" marL="0">
                         <a:buNone/>
                       </a:pPr>
-                      <a:endParaRPr lang="en-US" sz="1200" dirty="0"/>
+                      <a:r>
+                        <a:rPr lang="en-US" sz="1050" b="1" dirty="0">
+                          <a:solidFill>
+                            <a:schemeClr val="bg1"/>
+                          </a:solidFill>
+                        </a:rPr>
+                        <a:t>Tầng</a:t>
+                      </a:r>
+                      <a:endParaRPr lang="en-US" sz="1050" dirty="0"/>
                     </a:p>
                   </a:txBody>
-                  <a:tcPr marL="54864" marR="54864" marT="54864" marB="54864">
-                    <a:lnL w="9525" cap="flat" cmpd="sng" algn="ctr">
+                  <a:tcPr marL="36576" marR="36576" marT="36576" marB="36576" anchor="ctr">
+                    <a:lnL w="7620" cap="flat" cmpd="sng" algn="ctr">
                       <a:solidFill>
                         <a:srgbClr val="CBD5E1"/>
                       </a:solidFill>
@@ -4995,7 +4118,7 @@
                       <a:headEnd type="none" w="med" len="med"/>
                       <a:tailEnd type="none" w="med" len="med"/>
                     </a:lnL>
-                    <a:lnR w="9525" cap="flat" cmpd="sng" algn="ctr">
+                    <a:lnR w="7620" cap="flat" cmpd="sng" algn="ctr">
                       <a:solidFill>
                         <a:srgbClr val="CBD5E1"/>
                       </a:solidFill>
@@ -5004,7 +4127,7 @@
                       <a:headEnd type="none" w="med" len="med"/>
                       <a:tailEnd type="none" w="med" len="med"/>
                     </a:lnR>
-                    <a:lnT w="9525" cap="flat" cmpd="sng" algn="ctr">
+                    <a:lnT w="7620" cap="flat" cmpd="sng" algn="ctr">
                       <a:solidFill>
                         <a:srgbClr val="CBD5E1"/>
                       </a:solidFill>
@@ -5013,7 +4136,7 @@
                       <a:headEnd type="none" w="med" len="med"/>
                       <a:tailEnd type="none" w="med" len="med"/>
                     </a:lnT>
-                    <a:lnB w="9525" cap="flat" cmpd="sng" algn="ctr">
+                    <a:lnB w="7620" cap="flat" cmpd="sng" algn="ctr">
                       <a:solidFill>
                         <a:srgbClr val="CBD5E1"/>
                       </a:solidFill>
@@ -5036,18 +4159,18 @@
                         <a:buNone/>
                       </a:pPr>
                       <a:r>
-                        <a:rPr lang="en-US" sz="1200" b="1" dirty="0">
+                        <a:rPr lang="en-US" sz="1050" b="1" dirty="0">
                           <a:solidFill>
                             <a:schemeClr val="bg1"/>
                           </a:solidFill>
                         </a:rPr>
-                        <a:t>Thật</a:t>
+                        <a:t>Công nghệ</a:t>
                       </a:r>
-                      <a:endParaRPr lang="en-US" sz="1200" dirty="0"/>
+                      <a:endParaRPr lang="en-US" sz="1050" dirty="0"/>
                     </a:p>
                   </a:txBody>
-                  <a:tcPr marL="54864" marR="54864" marT="54864" marB="54864">
-                    <a:lnL w="9525" cap="flat" cmpd="sng" algn="ctr">
+                  <a:tcPr marL="36576" marR="36576" marT="36576" marB="36576" anchor="ctr">
+                    <a:lnL w="7620" cap="flat" cmpd="sng" algn="ctr">
                       <a:solidFill>
                         <a:srgbClr val="CBD5E1"/>
                       </a:solidFill>
@@ -5056,7 +4179,7 @@
                       <a:headEnd type="none" w="med" len="med"/>
                       <a:tailEnd type="none" w="med" len="med"/>
                     </a:lnL>
-                    <a:lnR w="9525" cap="flat" cmpd="sng" algn="ctr">
+                    <a:lnR w="7620" cap="flat" cmpd="sng" algn="ctr">
                       <a:solidFill>
                         <a:srgbClr val="CBD5E1"/>
                       </a:solidFill>
@@ -5065,7 +4188,7 @@
                       <a:headEnd type="none" w="med" len="med"/>
                       <a:tailEnd type="none" w="med" len="med"/>
                     </a:lnR>
-                    <a:lnT w="9525" cap="flat" cmpd="sng" algn="ctr">
+                    <a:lnT w="7620" cap="flat" cmpd="sng" algn="ctr">
                       <a:solidFill>
                         <a:srgbClr val="CBD5E1"/>
                       </a:solidFill>
@@ -5074,7 +4197,7 @@
                       <a:headEnd type="none" w="med" len="med"/>
                       <a:tailEnd type="none" w="med" len="med"/>
                     </a:lnT>
-                    <a:lnB w="9525" cap="flat" cmpd="sng" algn="ctr">
+                    <a:lnB w="7620" cap="flat" cmpd="sng" algn="ctr">
                       <a:solidFill>
                         <a:srgbClr val="CBD5E1"/>
                       </a:solidFill>
@@ -5096,19 +4219,11 @@
                       <a:pPr indent="0" marL="0">
                         <a:buNone/>
                       </a:pPr>
-                      <a:r>
-                        <a:rPr lang="en-US" sz="1200" b="1" dirty="0">
-                          <a:solidFill>
-                            <a:schemeClr val="bg1"/>
-                          </a:solidFill>
-                        </a:rPr>
-                        <a:t>Giả lập / chưa chứng minh</a:t>
-                      </a:r>
-                      <a:endParaRPr lang="en-US" sz="1200" dirty="0"/>
+                      <a:endParaRPr lang="en-US" sz="1050" dirty="0"/>
                     </a:p>
                   </a:txBody>
-                  <a:tcPr marL="54864" marR="54864" marT="54864" marB="54864">
-                    <a:lnL w="9525" cap="flat" cmpd="sng" algn="ctr">
+                  <a:tcPr marL="36576" marR="36576" marT="36576" marB="36576" anchor="ctr">
+                    <a:lnL w="7620" cap="flat" cmpd="sng" algn="ctr">
                       <a:solidFill>
                         <a:srgbClr val="CBD5E1"/>
                       </a:solidFill>
@@ -5117,7 +4232,7 @@
                       <a:headEnd type="none" w="med" len="med"/>
                       <a:tailEnd type="none" w="med" len="med"/>
                     </a:lnL>
-                    <a:lnR w="9525" cap="flat" cmpd="sng" algn="ctr">
+                    <a:lnR w="7620" cap="flat" cmpd="sng" algn="ctr">
                       <a:solidFill>
                         <a:srgbClr val="CBD5E1"/>
                       </a:solidFill>
@@ -5126,7 +4241,7 @@
                       <a:headEnd type="none" w="med" len="med"/>
                       <a:tailEnd type="none" w="med" len="med"/>
                     </a:lnR>
-                    <a:lnT w="9525" cap="flat" cmpd="sng" algn="ctr">
+                    <a:lnT w="7620" cap="flat" cmpd="sng" algn="ctr">
                       <a:solidFill>
                         <a:srgbClr val="CBD5E1"/>
                       </a:solidFill>
@@ -5135,7 +4250,7 @@
                       <a:headEnd type="none" w="med" len="med"/>
                       <a:tailEnd type="none" w="med" len="med"/>
                     </a:lnT>
-                    <a:lnB w="9525" cap="flat" cmpd="sng" algn="ctr">
+                    <a:lnB w="7620" cap="flat" cmpd="sng" algn="ctr">
                       <a:solidFill>
                         <a:srgbClr val="CBD5E1"/>
                       </a:solidFill>
@@ -5150,7 +4265,7 @@
                   </a:tcPr>
                 </a:tc>
               </a:tr>
-              <a:tr h="868680">
+              <a:tr h="301752">
                 <a:tc>
                   <a:txBody>
                     <a:bodyPr/>
@@ -5160,18 +4275,18 @@
                         <a:buNone/>
                       </a:pPr>
                       <a:r>
-                        <a:rPr lang="en-US" sz="1100" b="1" dirty="0">
+                        <a:rPr lang="en-US" sz="900" b="1" dirty="0">
                           <a:solidFill>
                             <a:schemeClr val="tx1"/>
                           </a:solidFill>
                         </a:rPr>
-                        <a:t>Thành phần</a:t>
+                        <a:t>Giao diện</a:t>
                       </a:r>
-                      <a:endParaRPr lang="en-US" sz="1100" dirty="0"/>
+                      <a:endParaRPr lang="en-US" sz="900" dirty="0"/>
                     </a:p>
                   </a:txBody>
-                  <a:tcPr marL="54864" marR="54864" marT="54864" marB="54864" anchor="t">
-                    <a:lnL w="9525" cap="flat" cmpd="sng" algn="ctr">
+                  <a:tcPr marL="36576" marR="36576" marT="36576" marB="36576" anchor="ctr">
+                    <a:lnL w="7620" cap="flat" cmpd="sng" algn="ctr">
                       <a:solidFill>
                         <a:srgbClr val="CBD5E1"/>
                       </a:solidFill>
@@ -5180,7 +4295,7 @@
                       <a:headEnd type="none" w="med" len="med"/>
                       <a:tailEnd type="none" w="med" len="med"/>
                     </a:lnL>
-                    <a:lnR w="9525" cap="flat" cmpd="sng" algn="ctr">
+                    <a:lnR w="7620" cap="flat" cmpd="sng" algn="ctr">
                       <a:solidFill>
                         <a:srgbClr val="CBD5E1"/>
                       </a:solidFill>
@@ -5189,7 +4304,7 @@
                       <a:headEnd type="none" w="med" len="med"/>
                       <a:tailEnd type="none" w="med" len="med"/>
                     </a:lnR>
-                    <a:lnT w="9525" cap="flat" cmpd="sng" algn="ctr">
+                    <a:lnT w="7620" cap="flat" cmpd="sng" algn="ctr">
                       <a:solidFill>
                         <a:srgbClr val="CBD5E1"/>
                       </a:solidFill>
@@ -5198,7 +4313,7 @@
                       <a:headEnd type="none" w="med" len="med"/>
                       <a:tailEnd type="none" w="med" len="med"/>
                     </a:lnT>
-                    <a:lnB w="9525" cap="flat" cmpd="sng" algn="ctr">
+                    <a:lnB w="7620" cap="flat" cmpd="sng" algn="ctr">
                       <a:solidFill>
                         <a:srgbClr val="CBD5E1"/>
                       </a:solidFill>
@@ -5221,18 +4336,18 @@
                         <a:buNone/>
                       </a:pPr>
                       <a:r>
-                        <a:rPr lang="en-US" sz="1100" dirty="0">
+                        <a:rPr lang="en-US" sz="900" dirty="0">
                           <a:solidFill>
                             <a:schemeClr val="tx1"/>
                           </a:solidFill>
                         </a:rPr>
-                        <a:t>Quy tắc, câu hỏi, workflow, nhật ký, dừng/hoàn tác, SQLite, parser XML, Gemini Vision, Verify</a:t>
+                        <a:t>Next.js 15 · React 19 · TypeScript · Tailwind</a:t>
                       </a:r>
-                      <a:endParaRPr lang="en-US" sz="1100" dirty="0"/>
+                      <a:endParaRPr lang="en-US" sz="900" dirty="0"/>
                     </a:p>
                   </a:txBody>
-                  <a:tcPr marL="54864" marR="54864" marT="54864" marB="54864" anchor="t">
-                    <a:lnL w="9525" cap="flat" cmpd="sng" algn="ctr">
+                  <a:tcPr marL="36576" marR="36576" marT="36576" marB="36576" anchor="ctr">
+                    <a:lnL w="7620" cap="flat" cmpd="sng" algn="ctr">
                       <a:solidFill>
                         <a:srgbClr val="CBD5E1"/>
                       </a:solidFill>
@@ -5241,7 +4356,7 @@
                       <a:headEnd type="none" w="med" len="med"/>
                       <a:tailEnd type="none" w="med" len="med"/>
                     </a:lnL>
-                    <a:lnR w="9525" cap="flat" cmpd="sng" algn="ctr">
+                    <a:lnR w="7620" cap="flat" cmpd="sng" algn="ctr">
                       <a:solidFill>
                         <a:srgbClr val="CBD5E1"/>
                       </a:solidFill>
@@ -5250,7 +4365,7 @@
                       <a:headEnd type="none" w="med" len="med"/>
                       <a:tailEnd type="none" w="med" len="med"/>
                     </a:lnR>
-                    <a:lnT w="9525" cap="flat" cmpd="sng" algn="ctr">
+                    <a:lnT w="7620" cap="flat" cmpd="sng" algn="ctr">
                       <a:solidFill>
                         <a:srgbClr val="CBD5E1"/>
                       </a:solidFill>
@@ -5259,7 +4374,131 @@
                       <a:headEnd type="none" w="med" len="med"/>
                       <a:tailEnd type="none" w="med" len="med"/>
                     </a:lnT>
-                    <a:lnB w="9525" cap="flat" cmpd="sng" algn="ctr">
+                    <a:lnB w="7620" cap="flat" cmpd="sng" algn="ctr">
+                      <a:solidFill>
+                        <a:srgbClr val="CBD5E1"/>
+                      </a:solidFill>
+                      <a:prstDash val="solid"/>
+                      <a:round/>
+                      <a:headEnd type="none" w="med" len="med"/>
+                      <a:tailEnd type="none" w="med" len="med"/>
+                    </a:lnB>
+                    <a:solidFill>
+                      <a:schemeClr val="bg1"/>
+                    </a:solidFill>
+                  </a:tcPr>
+                </a:tc>
+                <a:tc>
+                  <a:txBody>
+                    <a:bodyPr/>
+                    <a:lstStyle/>
+                    <a:p>
+                      <a:pPr algn="ctr" indent="0" marL="0">
+                        <a:buNone/>
+                      </a:pPr>
+                      <a:r>
+                        <a:rPr lang="en-US" sz="900" b="1" dirty="0">
+                          <a:solidFill>
+                            <a:schemeClr val="accent1"/>
+                          </a:solidFill>
+                        </a:rPr>
+                        <a:t>Thật</a:t>
+                      </a:r>
+                      <a:endParaRPr lang="en-US" sz="900" dirty="0"/>
+                    </a:p>
+                  </a:txBody>
+                  <a:tcPr marL="36576" marR="36576" marT="36576" marB="36576" anchor="ctr">
+                    <a:lnL w="7620" cap="flat" cmpd="sng" algn="ctr">
+                      <a:solidFill>
+                        <a:srgbClr val="CBD5E1"/>
+                      </a:solidFill>
+                      <a:prstDash val="solid"/>
+                      <a:round/>
+                      <a:headEnd type="none" w="med" len="med"/>
+                      <a:tailEnd type="none" w="med" len="med"/>
+                    </a:lnL>
+                    <a:lnR w="7620" cap="flat" cmpd="sng" algn="ctr">
+                      <a:solidFill>
+                        <a:srgbClr val="CBD5E1"/>
+                      </a:solidFill>
+                      <a:prstDash val="solid"/>
+                      <a:round/>
+                      <a:headEnd type="none" w="med" len="med"/>
+                      <a:tailEnd type="none" w="med" len="med"/>
+                    </a:lnR>
+                    <a:lnT w="7620" cap="flat" cmpd="sng" algn="ctr">
+                      <a:solidFill>
+                        <a:srgbClr val="CBD5E1"/>
+                      </a:solidFill>
+                      <a:prstDash val="solid"/>
+                      <a:round/>
+                      <a:headEnd type="none" w="med" len="med"/>
+                      <a:tailEnd type="none" w="med" len="med"/>
+                    </a:lnT>
+                    <a:lnB w="7620" cap="flat" cmpd="sng" algn="ctr">
+                      <a:solidFill>
+                        <a:srgbClr val="CBD5E1"/>
+                      </a:solidFill>
+                      <a:prstDash val="solid"/>
+                      <a:round/>
+                      <a:headEnd type="none" w="med" len="med"/>
+                      <a:tailEnd type="none" w="med" len="med"/>
+                    </a:lnB>
+                    <a:solidFill>
+                      <a:schemeClr val="bg1"/>
+                    </a:solidFill>
+                  </a:tcPr>
+                </a:tc>
+              </a:tr>
+              <a:tr h="301752">
+                <a:tc>
+                  <a:txBody>
+                    <a:bodyPr/>
+                    <a:lstStyle/>
+                    <a:p>
+                      <a:pPr indent="0" marL="0">
+                        <a:buNone/>
+                      </a:pPr>
+                      <a:r>
+                        <a:rPr lang="en-US" sz="900" b="1" dirty="0">
+                          <a:solidFill>
+                            <a:schemeClr val="tx1"/>
+                          </a:solidFill>
+                        </a:rPr>
+                        <a:t>Lõi quyết định</a:t>
+                      </a:r>
+                      <a:endParaRPr lang="en-US" sz="900" dirty="0"/>
+                    </a:p>
+                  </a:txBody>
+                  <a:tcPr marL="36576" marR="36576" marT="36576" marB="36576" anchor="ctr">
+                    <a:lnL w="7620" cap="flat" cmpd="sng" algn="ctr">
+                      <a:solidFill>
+                        <a:srgbClr val="CBD5E1"/>
+                      </a:solidFill>
+                      <a:prstDash val="solid"/>
+                      <a:round/>
+                      <a:headEnd type="none" w="med" len="med"/>
+                      <a:tailEnd type="none" w="med" len="med"/>
+                    </a:lnL>
+                    <a:lnR w="7620" cap="flat" cmpd="sng" algn="ctr">
+                      <a:solidFill>
+                        <a:srgbClr val="CBD5E1"/>
+                      </a:solidFill>
+                      <a:prstDash val="solid"/>
+                      <a:round/>
+                      <a:headEnd type="none" w="med" len="med"/>
+                      <a:tailEnd type="none" w="med" len="med"/>
+                    </a:lnR>
+                    <a:lnT w="7620" cap="flat" cmpd="sng" algn="ctr">
+                      <a:solidFill>
+                        <a:srgbClr val="CBD5E1"/>
+                      </a:solidFill>
+                      <a:prstDash val="solid"/>
+                      <a:round/>
+                      <a:headEnd type="none" w="med" len="med"/>
+                      <a:tailEnd type="none" w="med" len="med"/>
+                    </a:lnT>
+                    <a:lnB w="7620" cap="flat" cmpd="sng" algn="ctr">
                       <a:solidFill>
                         <a:srgbClr val="CBD5E1"/>
                       </a:solidFill>
@@ -5282,18 +4521,18 @@
                         <a:buNone/>
                       </a:pPr>
                       <a:r>
-                        <a:rPr lang="en-US" sz="1100" dirty="0">
+                        <a:rPr lang="en-US" sz="900" dirty="0">
                           <a:solidFill>
                             <a:schemeClr val="tx1"/>
                           </a:solidFill>
                         </a:rPr>
-                        <a:t>Ngân hàng, đối soát TCT, ERP (chỉ xuất payload), báo cáo thuế — nhóm “Mở rộng · beta”</a:t>
+                        <a:t>24 quy tắc tất định · 3 kiểu dừng · Zod</a:t>
                       </a:r>
-                      <a:endParaRPr lang="en-US" sz="1100" dirty="0"/>
+                      <a:endParaRPr lang="en-US" sz="900" dirty="0"/>
                     </a:p>
                   </a:txBody>
-                  <a:tcPr marL="54864" marR="54864" marT="54864" marB="54864" anchor="t">
-                    <a:lnL w="9525" cap="flat" cmpd="sng" algn="ctr">
+                  <a:tcPr marL="36576" marR="36576" marT="36576" marB="36576" anchor="ctr">
+                    <a:lnL w="7620" cap="flat" cmpd="sng" algn="ctr">
                       <a:solidFill>
                         <a:srgbClr val="CBD5E1"/>
                       </a:solidFill>
@@ -5302,7 +4541,7 @@
                       <a:headEnd type="none" w="med" len="med"/>
                       <a:tailEnd type="none" w="med" len="med"/>
                     </a:lnL>
-                    <a:lnR w="9525" cap="flat" cmpd="sng" algn="ctr">
+                    <a:lnR w="7620" cap="flat" cmpd="sng" algn="ctr">
                       <a:solidFill>
                         <a:srgbClr val="CBD5E1"/>
                       </a:solidFill>
@@ -5311,7 +4550,7 @@
                       <a:headEnd type="none" w="med" len="med"/>
                       <a:tailEnd type="none" w="med" len="med"/>
                     </a:lnR>
-                    <a:lnT w="9525" cap="flat" cmpd="sng" algn="ctr">
+                    <a:lnT w="7620" cap="flat" cmpd="sng" algn="ctr">
                       <a:solidFill>
                         <a:srgbClr val="CBD5E1"/>
                       </a:solidFill>
@@ -5320,7 +4559,68 @@
                       <a:headEnd type="none" w="med" len="med"/>
                       <a:tailEnd type="none" w="med" len="med"/>
                     </a:lnT>
-                    <a:lnB w="9525" cap="flat" cmpd="sng" algn="ctr">
+                    <a:lnB w="7620" cap="flat" cmpd="sng" algn="ctr">
+                      <a:solidFill>
+                        <a:srgbClr val="CBD5E1"/>
+                      </a:solidFill>
+                      <a:prstDash val="solid"/>
+                      <a:round/>
+                      <a:headEnd type="none" w="med" len="med"/>
+                      <a:tailEnd type="none" w="med" len="med"/>
+                    </a:lnB>
+                    <a:solidFill>
+                      <a:schemeClr val="bg1"/>
+                    </a:solidFill>
+                  </a:tcPr>
+                </a:tc>
+                <a:tc>
+                  <a:txBody>
+                    <a:bodyPr/>
+                    <a:lstStyle/>
+                    <a:p>
+                      <a:pPr algn="ctr" indent="0" marL="0">
+                        <a:buNone/>
+                      </a:pPr>
+                      <a:r>
+                        <a:rPr lang="en-US" sz="900" b="1" dirty="0">
+                          <a:solidFill>
+                            <a:schemeClr val="accent1"/>
+                          </a:solidFill>
+                        </a:rPr>
+                        <a:t>Thật</a:t>
+                      </a:r>
+                      <a:endParaRPr lang="en-US" sz="900" dirty="0"/>
+                    </a:p>
+                  </a:txBody>
+                  <a:tcPr marL="36576" marR="36576" marT="36576" marB="36576" anchor="ctr">
+                    <a:lnL w="7620" cap="flat" cmpd="sng" algn="ctr">
+                      <a:solidFill>
+                        <a:srgbClr val="CBD5E1"/>
+                      </a:solidFill>
+                      <a:prstDash val="solid"/>
+                      <a:round/>
+                      <a:headEnd type="none" w="med" len="med"/>
+                      <a:tailEnd type="none" w="med" len="med"/>
+                    </a:lnL>
+                    <a:lnR w="7620" cap="flat" cmpd="sng" algn="ctr">
+                      <a:solidFill>
+                        <a:srgbClr val="CBD5E1"/>
+                      </a:solidFill>
+                      <a:prstDash val="solid"/>
+                      <a:round/>
+                      <a:headEnd type="none" w="med" len="med"/>
+                      <a:tailEnd type="none" w="med" len="med"/>
+                    </a:lnR>
+                    <a:lnT w="7620" cap="flat" cmpd="sng" algn="ctr">
+                      <a:solidFill>
+                        <a:srgbClr val="CBD5E1"/>
+                      </a:solidFill>
+                      <a:prstDash val="solid"/>
+                      <a:round/>
+                      <a:headEnd type="none" w="med" len="med"/>
+                      <a:tailEnd type="none" w="med" len="med"/>
+                    </a:lnT>
+                    <a:lnB w="7620" cap="flat" cmpd="sng" algn="ctr">
                       <a:solidFill>
                         <a:srgbClr val="CBD5E1"/>
                       </a:solidFill>
@@ -5335,7 +4635,7 @@
                   </a:tcPr>
                 </a:tc>
               </a:tr>
-              <a:tr h="731520">
+              <a:tr h="301752">
                 <a:tc>
                   <a:txBody>
                     <a:bodyPr/>
@@ -5345,18 +4645,18 @@
                         <a:buNone/>
                       </a:pPr>
                       <a:r>
-                        <a:rPr lang="en-US" sz="1100" b="1" dirty="0">
+                        <a:rPr lang="en-US" sz="900" b="1" dirty="0">
                           <a:solidFill>
                             <a:schemeClr val="tx1"/>
                           </a:solidFill>
                         </a:rPr>
-                        <a:t>Dữ liệu</a:t>
+                        <a:t>Đọc chứng từ</a:t>
                       </a:r>
-                      <a:endParaRPr lang="en-US" sz="1100" dirty="0"/>
+                      <a:endParaRPr lang="en-US" sz="900" dirty="0"/>
                     </a:p>
                   </a:txBody>
-                  <a:tcPr marL="54864" marR="54864" marT="54864" marB="54864" anchor="t">
-                    <a:lnL w="9525" cap="flat" cmpd="sng" algn="ctr">
+                  <a:tcPr marL="36576" marR="36576" marT="36576" marB="36576" anchor="ctr">
+                    <a:lnL w="7620" cap="flat" cmpd="sng" algn="ctr">
                       <a:solidFill>
                         <a:srgbClr val="CBD5E1"/>
                       </a:solidFill>
@@ -5365,7 +4665,7 @@
                       <a:headEnd type="none" w="med" len="med"/>
                       <a:tailEnd type="none" w="med" len="med"/>
                     </a:lnL>
-                    <a:lnR w="9525" cap="flat" cmpd="sng" algn="ctr">
+                    <a:lnR w="7620" cap="flat" cmpd="sng" algn="ctr">
                       <a:solidFill>
                         <a:srgbClr val="CBD5E1"/>
                       </a:solidFill>
@@ -5374,7 +4674,7 @@
                       <a:headEnd type="none" w="med" len="med"/>
                       <a:tailEnd type="none" w="med" len="med"/>
                     </a:lnR>
-                    <a:lnT w="9525" cap="flat" cmpd="sng" algn="ctr">
+                    <a:lnT w="7620" cap="flat" cmpd="sng" algn="ctr">
                       <a:solidFill>
                         <a:srgbClr val="CBD5E1"/>
                       </a:solidFill>
@@ -5383,7 +4683,7 @@
                       <a:headEnd type="none" w="med" len="med"/>
                       <a:tailEnd type="none" w="med" len="med"/>
                     </a:lnT>
-                    <a:lnB w="9525" cap="flat" cmpd="sng" algn="ctr">
+                    <a:lnB w="7620" cap="flat" cmpd="sng" algn="ctr">
                       <a:solidFill>
                         <a:srgbClr val="CBD5E1"/>
                       </a:solidFill>
@@ -5406,18 +4706,18 @@
                         <a:buNone/>
                       </a:pPr>
                       <a:r>
-                        <a:rPr lang="en-US" sz="1100" dirty="0">
+                        <a:rPr lang="en-US" sz="900" dirty="0">
                           <a:solidFill>
                             <a:schemeClr val="tx1"/>
                           </a:solidFill>
                         </a:rPr>
-                        <a:t>XML mẫu công khai của 5 nhà phát hành (Viettel, MISA, VNPT, FPT, TCT)</a:t>
+                        <a:t>XML 5 định dạng · Gemini Vision (chỉ đọc)</a:t>
                       </a:r>
-                      <a:endParaRPr lang="en-US" sz="1100" dirty="0"/>
+                      <a:endParaRPr lang="en-US" sz="900" dirty="0"/>
                     </a:p>
                   </a:txBody>
-                  <a:tcPr marL="54864" marR="54864" marT="54864" marB="54864" anchor="t">
-                    <a:lnL w="9525" cap="flat" cmpd="sng" algn="ctr">
+                  <a:tcPr marL="36576" marR="36576" marT="36576" marB="36576" anchor="ctr">
+                    <a:lnL w="7620" cap="flat" cmpd="sng" algn="ctr">
                       <a:solidFill>
                         <a:srgbClr val="CBD5E1"/>
                       </a:solidFill>
@@ -5426,7 +4726,7 @@
                       <a:headEnd type="none" w="med" len="med"/>
                       <a:tailEnd type="none" w="med" len="med"/>
                     </a:lnL>
-                    <a:lnR w="9525" cap="flat" cmpd="sng" algn="ctr">
+                    <a:lnR w="7620" cap="flat" cmpd="sng" algn="ctr">
                       <a:solidFill>
                         <a:srgbClr val="CBD5E1"/>
                       </a:solidFill>
@@ -5435,7 +4735,7 @@
                       <a:headEnd type="none" w="med" len="med"/>
                       <a:tailEnd type="none" w="med" len="med"/>
                     </a:lnR>
-                    <a:lnT w="9525" cap="flat" cmpd="sng" algn="ctr">
+                    <a:lnT w="7620" cap="flat" cmpd="sng" algn="ctr">
                       <a:solidFill>
                         <a:srgbClr val="CBD5E1"/>
                       </a:solidFill>
@@ -5444,7 +4744,131 @@
                       <a:headEnd type="none" w="med" len="med"/>
                       <a:tailEnd type="none" w="med" len="med"/>
                     </a:lnT>
-                    <a:lnB w="9525" cap="flat" cmpd="sng" algn="ctr">
+                    <a:lnB w="7620" cap="flat" cmpd="sng" algn="ctr">
+                      <a:solidFill>
+                        <a:srgbClr val="CBD5E1"/>
+                      </a:solidFill>
+                      <a:prstDash val="solid"/>
+                      <a:round/>
+                      <a:headEnd type="none" w="med" len="med"/>
+                      <a:tailEnd type="none" w="med" len="med"/>
+                    </a:lnB>
+                    <a:solidFill>
+                      <a:schemeClr val="bg1"/>
+                    </a:solidFill>
+                  </a:tcPr>
+                </a:tc>
+                <a:tc>
+                  <a:txBody>
+                    <a:bodyPr/>
+                    <a:lstStyle/>
+                    <a:p>
+                      <a:pPr algn="ctr" indent="0" marL="0">
+                        <a:buNone/>
+                      </a:pPr>
+                      <a:r>
+                        <a:rPr lang="en-US" sz="900" b="1" dirty="0">
+                          <a:solidFill>
+                            <a:schemeClr val="accent1"/>
+                          </a:solidFill>
+                        </a:rPr>
+                        <a:t>Thật</a:t>
+                      </a:r>
+                      <a:endParaRPr lang="en-US" sz="900" dirty="0"/>
+                    </a:p>
+                  </a:txBody>
+                  <a:tcPr marL="36576" marR="36576" marT="36576" marB="36576" anchor="ctr">
+                    <a:lnL w="7620" cap="flat" cmpd="sng" algn="ctr">
+                      <a:solidFill>
+                        <a:srgbClr val="CBD5E1"/>
+                      </a:solidFill>
+                      <a:prstDash val="solid"/>
+                      <a:round/>
+                      <a:headEnd type="none" w="med" len="med"/>
+                      <a:tailEnd type="none" w="med" len="med"/>
+                    </a:lnL>
+                    <a:lnR w="7620" cap="flat" cmpd="sng" algn="ctr">
+                      <a:solidFill>
+                        <a:srgbClr val="CBD5E1"/>
+                      </a:solidFill>
+                      <a:prstDash val="solid"/>
+                      <a:round/>
+                      <a:headEnd type="none" w="med" len="med"/>
+                      <a:tailEnd type="none" w="med" len="med"/>
+                    </a:lnR>
+                    <a:lnT w="7620" cap="flat" cmpd="sng" algn="ctr">
+                      <a:solidFill>
+                        <a:srgbClr val="CBD5E1"/>
+                      </a:solidFill>
+                      <a:prstDash val="solid"/>
+                      <a:round/>
+                      <a:headEnd type="none" w="med" len="med"/>
+                      <a:tailEnd type="none" w="med" len="med"/>
+                    </a:lnT>
+                    <a:lnB w="7620" cap="flat" cmpd="sng" algn="ctr">
+                      <a:solidFill>
+                        <a:srgbClr val="CBD5E1"/>
+                      </a:solidFill>
+                      <a:prstDash val="solid"/>
+                      <a:round/>
+                      <a:headEnd type="none" w="med" len="med"/>
+                      <a:tailEnd type="none" w="med" len="med"/>
+                    </a:lnB>
+                    <a:solidFill>
+                      <a:schemeClr val="bg1"/>
+                    </a:solidFill>
+                  </a:tcPr>
+                </a:tc>
+              </a:tr>
+              <a:tr h="301752">
+                <a:tc>
+                  <a:txBody>
+                    <a:bodyPr/>
+                    <a:lstStyle/>
+                    <a:p>
+                      <a:pPr indent="0" marL="0">
+                        <a:buNone/>
+                      </a:pPr>
+                      <a:r>
+                        <a:rPr lang="en-US" sz="900" b="1" dirty="0">
+                          <a:solidFill>
+                            <a:schemeClr val="tx1"/>
+                          </a:solidFill>
+                        </a:rPr>
+                        <a:t>Dữ liệu, kiểm toán</a:t>
+                      </a:r>
+                      <a:endParaRPr lang="en-US" sz="900" dirty="0"/>
+                    </a:p>
+                  </a:txBody>
+                  <a:tcPr marL="36576" marR="36576" marT="36576" marB="36576" anchor="ctr">
+                    <a:lnL w="7620" cap="flat" cmpd="sng" algn="ctr">
+                      <a:solidFill>
+                        <a:srgbClr val="CBD5E1"/>
+                      </a:solidFill>
+                      <a:prstDash val="solid"/>
+                      <a:round/>
+                      <a:headEnd type="none" w="med" len="med"/>
+                      <a:tailEnd type="none" w="med" len="med"/>
+                    </a:lnL>
+                    <a:lnR w="7620" cap="flat" cmpd="sng" algn="ctr">
+                      <a:solidFill>
+                        <a:srgbClr val="CBD5E1"/>
+                      </a:solidFill>
+                      <a:prstDash val="solid"/>
+                      <a:round/>
+                      <a:headEnd type="none" w="med" len="med"/>
+                      <a:tailEnd type="none" w="med" len="med"/>
+                    </a:lnR>
+                    <a:lnT w="7620" cap="flat" cmpd="sng" algn="ctr">
+                      <a:solidFill>
+                        <a:srgbClr val="CBD5E1"/>
+                      </a:solidFill>
+                      <a:prstDash val="solid"/>
+                      <a:round/>
+                      <a:headEnd type="none" w="med" len="med"/>
+                      <a:tailEnd type="none" w="med" len="med"/>
+                    </a:lnT>
+                    <a:lnB w="7620" cap="flat" cmpd="sng" algn="ctr">
                       <a:solidFill>
                         <a:srgbClr val="CBD5E1"/>
                       </a:solidFill>
@@ -5467,18 +4891,18 @@
                         <a:buNone/>
                       </a:pPr>
                       <a:r>
-                        <a:rPr lang="en-US" sz="1100" dirty="0">
+                        <a:rPr lang="en-US" sz="900" dirty="0">
                           <a:solidFill>
                             <a:schemeClr val="tx1"/>
                           </a:solidFill>
                         </a:rPr>
-                        <a:t>Toàn bộ ca Verify và 60 ca phát triển do đội tổng hợp; MST thử nghiệm</a:t>
+                        <a:t>SQLite WAL · nhật ký chỉ ghi thêm · hash + HMAC</a:t>
                       </a:r>
-                      <a:endParaRPr lang="en-US" sz="1100" dirty="0"/>
+                      <a:endParaRPr lang="en-US" sz="900" dirty="0"/>
                     </a:p>
                   </a:txBody>
-                  <a:tcPr marL="54864" marR="54864" marT="54864" marB="54864" anchor="t">
-                    <a:lnL w="9525" cap="flat" cmpd="sng" algn="ctr">
+                  <a:tcPr marL="36576" marR="36576" marT="36576" marB="36576" anchor="ctr">
+                    <a:lnL w="7620" cap="flat" cmpd="sng" algn="ctr">
                       <a:solidFill>
                         <a:srgbClr val="CBD5E1"/>
                       </a:solidFill>
@@ -5487,7 +4911,7 @@
                       <a:headEnd type="none" w="med" len="med"/>
                       <a:tailEnd type="none" w="med" len="med"/>
                     </a:lnL>
-                    <a:lnR w="9525" cap="flat" cmpd="sng" algn="ctr">
+                    <a:lnR w="7620" cap="flat" cmpd="sng" algn="ctr">
                       <a:solidFill>
                         <a:srgbClr val="CBD5E1"/>
                       </a:solidFill>
@@ -5496,7 +4920,7 @@
                       <a:headEnd type="none" w="med" len="med"/>
                       <a:tailEnd type="none" w="med" len="med"/>
                     </a:lnR>
-                    <a:lnT w="9525" cap="flat" cmpd="sng" algn="ctr">
+                    <a:lnT w="7620" cap="flat" cmpd="sng" algn="ctr">
                       <a:solidFill>
                         <a:srgbClr val="CBD5E1"/>
                       </a:solidFill>
@@ -5505,7 +4929,68 @@
                       <a:headEnd type="none" w="med" len="med"/>
                       <a:tailEnd type="none" w="med" len="med"/>
                     </a:lnT>
-                    <a:lnB w="9525" cap="flat" cmpd="sng" algn="ctr">
+                    <a:lnB w="7620" cap="flat" cmpd="sng" algn="ctr">
+                      <a:solidFill>
+                        <a:srgbClr val="CBD5E1"/>
+                      </a:solidFill>
+                      <a:prstDash val="solid"/>
+                      <a:round/>
+                      <a:headEnd type="none" w="med" len="med"/>
+                      <a:tailEnd type="none" w="med" len="med"/>
+                    </a:lnB>
+                    <a:solidFill>
+                      <a:schemeClr val="bg1"/>
+                    </a:solidFill>
+                  </a:tcPr>
+                </a:tc>
+                <a:tc>
+                  <a:txBody>
+                    <a:bodyPr/>
+                    <a:lstStyle/>
+                    <a:p>
+                      <a:pPr algn="ctr" indent="0" marL="0">
+                        <a:buNone/>
+                      </a:pPr>
+                      <a:r>
+                        <a:rPr lang="en-US" sz="900" b="1" dirty="0">
+                          <a:solidFill>
+                            <a:schemeClr val="accent1"/>
+                          </a:solidFill>
+                        </a:rPr>
+                        <a:t>Thật</a:t>
+                      </a:r>
+                      <a:endParaRPr lang="en-US" sz="900" dirty="0"/>
+                    </a:p>
+                  </a:txBody>
+                  <a:tcPr marL="36576" marR="36576" marT="36576" marB="36576" anchor="ctr">
+                    <a:lnL w="7620" cap="flat" cmpd="sng" algn="ctr">
+                      <a:solidFill>
+                        <a:srgbClr val="CBD5E1"/>
+                      </a:solidFill>
+                      <a:prstDash val="solid"/>
+                      <a:round/>
+                      <a:headEnd type="none" w="med" len="med"/>
+                      <a:tailEnd type="none" w="med" len="med"/>
+                    </a:lnL>
+                    <a:lnR w="7620" cap="flat" cmpd="sng" algn="ctr">
+                      <a:solidFill>
+                        <a:srgbClr val="CBD5E1"/>
+                      </a:solidFill>
+                      <a:prstDash val="solid"/>
+                      <a:round/>
+                      <a:headEnd type="none" w="med" len="med"/>
+                      <a:tailEnd type="none" w="med" len="med"/>
+                    </a:lnR>
+                    <a:lnT w="7620" cap="flat" cmpd="sng" algn="ctr">
+                      <a:solidFill>
+                        <a:srgbClr val="CBD5E1"/>
+                      </a:solidFill>
+                      <a:prstDash val="solid"/>
+                      <a:round/>
+                      <a:headEnd type="none" w="med" len="med"/>
+                      <a:tailEnd type="none" w="med" len="med"/>
+                    </a:lnT>
+                    <a:lnB w="7620" cap="flat" cmpd="sng" algn="ctr">
                       <a:solidFill>
                         <a:srgbClr val="CBD5E1"/>
                       </a:solidFill>
@@ -5520,7 +5005,7 @@
                   </a:tcPr>
                 </a:tc>
               </a:tr>
-              <a:tr h="548640">
+              <a:tr h="301752">
                 <a:tc>
                   <a:txBody>
                     <a:bodyPr/>
@@ -5530,18 +5015,18 @@
                         <a:buNone/>
                       </a:pPr>
                       <a:r>
-                        <a:rPr lang="en-US" sz="1100" b="1" dirty="0">
+                        <a:rPr lang="en-US" sz="900" b="1" dirty="0">
                           <a:solidFill>
                             <a:schemeClr val="tx1"/>
                           </a:solidFill>
                         </a:rPr>
-                        <a:t>Người dùng</a:t>
+                        <a:t>Bảo mật</a:t>
                       </a:r>
-                      <a:endParaRPr lang="en-US" sz="1100" dirty="0"/>
+                      <a:endParaRPr lang="en-US" sz="900" dirty="0"/>
                     </a:p>
                   </a:txBody>
-                  <a:tcPr marL="54864" marR="54864" marT="54864" marB="54864" anchor="t">
-                    <a:lnL w="9525" cap="flat" cmpd="sng" algn="ctr">
+                  <a:tcPr marL="36576" marR="36576" marT="36576" marB="36576" anchor="ctr">
+                    <a:lnL w="7620" cap="flat" cmpd="sng" algn="ctr">
                       <a:solidFill>
                         <a:srgbClr val="CBD5E1"/>
                       </a:solidFill>
@@ -5550,7 +5035,7 @@
                       <a:headEnd type="none" w="med" len="med"/>
                       <a:tailEnd type="none" w="med" len="med"/>
                     </a:lnL>
-                    <a:lnR w="9525" cap="flat" cmpd="sng" algn="ctr">
+                    <a:lnR w="7620" cap="flat" cmpd="sng" algn="ctr">
                       <a:solidFill>
                         <a:srgbClr val="CBD5E1"/>
                       </a:solidFill>
@@ -5559,7 +5044,7 @@
                       <a:headEnd type="none" w="med" len="med"/>
                       <a:tailEnd type="none" w="med" len="med"/>
                     </a:lnR>
-                    <a:lnT w="9525" cap="flat" cmpd="sng" algn="ctr">
+                    <a:lnT w="7620" cap="flat" cmpd="sng" algn="ctr">
                       <a:solidFill>
                         <a:srgbClr val="CBD5E1"/>
                       </a:solidFill>
@@ -5568,7 +5053,7 @@
                       <a:headEnd type="none" w="med" len="med"/>
                       <a:tailEnd type="none" w="med" len="med"/>
                     </a:lnT>
-                    <a:lnB w="9525" cap="flat" cmpd="sng" algn="ctr">
+                    <a:lnB w="7620" cap="flat" cmpd="sng" algn="ctr">
                       <a:solidFill>
                         <a:srgbClr val="CBD5E1"/>
                       </a:solidFill>
@@ -5591,18 +5076,18 @@
                         <a:buNone/>
                       </a:pPr>
                       <a:r>
-                        <a:rPr lang="en-US" sz="1100" dirty="0">
+                        <a:rPr lang="en-US" sz="900" dirty="0">
                           <a:solidFill>
                             <a:schemeClr val="tx1"/>
                           </a:solidFill>
                         </a:rPr>
-                        <a:t>3 người dùng do BTC điều phối [16/10]</a:t>
+                        <a:t>Phân quyền · chống CSRF · giới hạn tần suất</a:t>
                       </a:r>
-                      <a:endParaRPr lang="en-US" sz="1100" dirty="0"/>
+                      <a:endParaRPr lang="en-US" sz="900" dirty="0"/>
                     </a:p>
                   </a:txBody>
-                  <a:tcPr marL="54864" marR="54864" marT="54864" marB="54864" anchor="t">
-                    <a:lnL w="9525" cap="flat" cmpd="sng" algn="ctr">
+                  <a:tcPr marL="36576" marR="36576" marT="36576" marB="36576" anchor="ctr">
+                    <a:lnL w="7620" cap="flat" cmpd="sng" algn="ctr">
                       <a:solidFill>
                         <a:srgbClr val="CBD5E1"/>
                       </a:solidFill>
@@ -5611,7 +5096,7 @@
                       <a:headEnd type="none" w="med" len="med"/>
                       <a:tailEnd type="none" w="med" len="med"/>
                     </a:lnL>
-                    <a:lnR w="9525" cap="flat" cmpd="sng" algn="ctr">
+                    <a:lnR w="7620" cap="flat" cmpd="sng" algn="ctr">
                       <a:solidFill>
                         <a:srgbClr val="CBD5E1"/>
                       </a:solidFill>
@@ -5620,7 +5105,7 @@
                       <a:headEnd type="none" w="med" len="med"/>
                       <a:tailEnd type="none" w="med" len="med"/>
                     </a:lnR>
-                    <a:lnT w="9525" cap="flat" cmpd="sng" algn="ctr">
+                    <a:lnT w="7620" cap="flat" cmpd="sng" algn="ctr">
                       <a:solidFill>
                         <a:srgbClr val="CBD5E1"/>
                       </a:solidFill>
@@ -5629,7 +5114,131 @@
                       <a:headEnd type="none" w="med" len="med"/>
                       <a:tailEnd type="none" w="med" len="med"/>
                     </a:lnT>
-                    <a:lnB w="9525" cap="flat" cmpd="sng" algn="ctr">
+                    <a:lnB w="7620" cap="flat" cmpd="sng" algn="ctr">
+                      <a:solidFill>
+                        <a:srgbClr val="CBD5E1"/>
+                      </a:solidFill>
+                      <a:prstDash val="solid"/>
+                      <a:round/>
+                      <a:headEnd type="none" w="med" len="med"/>
+                      <a:tailEnd type="none" w="med" len="med"/>
+                    </a:lnB>
+                    <a:solidFill>
+                      <a:schemeClr val="bg1"/>
+                    </a:solidFill>
+                  </a:tcPr>
+                </a:tc>
+                <a:tc>
+                  <a:txBody>
+                    <a:bodyPr/>
+                    <a:lstStyle/>
+                    <a:p>
+                      <a:pPr algn="ctr" indent="0" marL="0">
+                        <a:buNone/>
+                      </a:pPr>
+                      <a:r>
+                        <a:rPr lang="en-US" sz="900" b="1" dirty="0">
+                          <a:solidFill>
+                            <a:schemeClr val="accent1"/>
+                          </a:solidFill>
+                        </a:rPr>
+                        <a:t>Thật</a:t>
+                      </a:r>
+                      <a:endParaRPr lang="en-US" sz="900" dirty="0"/>
+                    </a:p>
+                  </a:txBody>
+                  <a:tcPr marL="36576" marR="36576" marT="36576" marB="36576" anchor="ctr">
+                    <a:lnL w="7620" cap="flat" cmpd="sng" algn="ctr">
+                      <a:solidFill>
+                        <a:srgbClr val="CBD5E1"/>
+                      </a:solidFill>
+                      <a:prstDash val="solid"/>
+                      <a:round/>
+                      <a:headEnd type="none" w="med" len="med"/>
+                      <a:tailEnd type="none" w="med" len="med"/>
+                    </a:lnL>
+                    <a:lnR w="7620" cap="flat" cmpd="sng" algn="ctr">
+                      <a:solidFill>
+                        <a:srgbClr val="CBD5E1"/>
+                      </a:solidFill>
+                      <a:prstDash val="solid"/>
+                      <a:round/>
+                      <a:headEnd type="none" w="med" len="med"/>
+                      <a:tailEnd type="none" w="med" len="med"/>
+                    </a:lnR>
+                    <a:lnT w="7620" cap="flat" cmpd="sng" algn="ctr">
+                      <a:solidFill>
+                        <a:srgbClr val="CBD5E1"/>
+                      </a:solidFill>
+                      <a:prstDash val="solid"/>
+                      <a:round/>
+                      <a:headEnd type="none" w="med" len="med"/>
+                      <a:tailEnd type="none" w="med" len="med"/>
+                    </a:lnT>
+                    <a:lnB w="7620" cap="flat" cmpd="sng" algn="ctr">
+                      <a:solidFill>
+                        <a:srgbClr val="CBD5E1"/>
+                      </a:solidFill>
+                      <a:prstDash val="solid"/>
+                      <a:round/>
+                      <a:headEnd type="none" w="med" len="med"/>
+                      <a:tailEnd type="none" w="med" len="med"/>
+                    </a:lnB>
+                    <a:solidFill>
+                      <a:schemeClr val="bg1"/>
+                    </a:solidFill>
+                  </a:tcPr>
+                </a:tc>
+              </a:tr>
+              <a:tr h="301752">
+                <a:tc>
+                  <a:txBody>
+                    <a:bodyPr/>
+                    <a:lstStyle/>
+                    <a:p>
+                      <a:pPr indent="0" marL="0">
+                        <a:buNone/>
+                      </a:pPr>
+                      <a:r>
+                        <a:rPr lang="en-US" sz="900" b="1" dirty="0">
+                          <a:solidFill>
+                            <a:schemeClr val="tx1"/>
+                          </a:solidFill>
+                        </a:rPr>
+                        <a:t>Kiểm thử, CI</a:t>
+                      </a:r>
+                      <a:endParaRPr lang="en-US" sz="900" dirty="0"/>
+                    </a:p>
+                  </a:txBody>
+                  <a:tcPr marL="36576" marR="36576" marT="36576" marB="36576" anchor="ctr">
+                    <a:lnL w="7620" cap="flat" cmpd="sng" algn="ctr">
+                      <a:solidFill>
+                        <a:srgbClr val="CBD5E1"/>
+                      </a:solidFill>
+                      <a:prstDash val="solid"/>
+                      <a:round/>
+                      <a:headEnd type="none" w="med" len="med"/>
+                      <a:tailEnd type="none" w="med" len="med"/>
+                    </a:lnL>
+                    <a:lnR w="7620" cap="flat" cmpd="sng" algn="ctr">
+                      <a:solidFill>
+                        <a:srgbClr val="CBD5E1"/>
+                      </a:solidFill>
+                      <a:prstDash val="solid"/>
+                      <a:round/>
+                      <a:headEnd type="none" w="med" len="med"/>
+                      <a:tailEnd type="none" w="med" len="med"/>
+                    </a:lnR>
+                    <a:lnT w="7620" cap="flat" cmpd="sng" algn="ctr">
+                      <a:solidFill>
+                        <a:srgbClr val="CBD5E1"/>
+                      </a:solidFill>
+                      <a:prstDash val="solid"/>
+                      <a:round/>
+                      <a:headEnd type="none" w="med" len="med"/>
+                      <a:tailEnd type="none" w="med" len="med"/>
+                    </a:lnT>
+                    <a:lnB w="7620" cap="flat" cmpd="sng" algn="ctr">
                       <a:solidFill>
                         <a:srgbClr val="CBD5E1"/>
                       </a:solidFill>
@@ -5652,18 +5261,18 @@
                         <a:buNone/>
                       </a:pPr>
                       <a:r>
-                        <a:rPr lang="en-US" sz="1100" dirty="0">
+                        <a:rPr lang="en-US" sz="900" dirty="0">
                           <a:solidFill>
                             <a:schemeClr val="tx1"/>
                           </a:solidFill>
                         </a:rPr>
-                        <a:t>Vai trò KTT/CFO trong demo là mô phỏng</a:t>
+                        <a:t>16 bộ test · 72 ca red team · Playwright · CI</a:t>
                       </a:r>
-                      <a:endParaRPr lang="en-US" sz="1100" dirty="0"/>
+                      <a:endParaRPr lang="en-US" sz="900" dirty="0"/>
                     </a:p>
                   </a:txBody>
-                  <a:tcPr marL="54864" marR="54864" marT="54864" marB="54864" anchor="t">
-                    <a:lnL w="9525" cap="flat" cmpd="sng" algn="ctr">
+                  <a:tcPr marL="36576" marR="36576" marT="36576" marB="36576" anchor="ctr">
+                    <a:lnL w="7620" cap="flat" cmpd="sng" algn="ctr">
                       <a:solidFill>
                         <a:srgbClr val="CBD5E1"/>
                       </a:solidFill>
@@ -5672,7 +5281,7 @@
                       <a:headEnd type="none" w="med" len="med"/>
                       <a:tailEnd type="none" w="med" len="med"/>
                     </a:lnL>
-                    <a:lnR w="9525" cap="flat" cmpd="sng" algn="ctr">
+                    <a:lnR w="7620" cap="flat" cmpd="sng" algn="ctr">
                       <a:solidFill>
                         <a:srgbClr val="CBD5E1"/>
                       </a:solidFill>
@@ -5681,7 +5290,7 @@
                       <a:headEnd type="none" w="med" len="med"/>
                       <a:tailEnd type="none" w="med" len="med"/>
                     </a:lnR>
-                    <a:lnT w="9525" cap="flat" cmpd="sng" algn="ctr">
+                    <a:lnT w="7620" cap="flat" cmpd="sng" algn="ctr">
                       <a:solidFill>
                         <a:srgbClr val="CBD5E1"/>
                       </a:solidFill>
@@ -5690,7 +5299,623 @@
                       <a:headEnd type="none" w="med" len="med"/>
                       <a:tailEnd type="none" w="med" len="med"/>
                     </a:lnT>
-                    <a:lnB w="9525" cap="flat" cmpd="sng" algn="ctr">
+                    <a:lnB w="7620" cap="flat" cmpd="sng" algn="ctr">
+                      <a:solidFill>
+                        <a:srgbClr val="CBD5E1"/>
+                      </a:solidFill>
+                      <a:prstDash val="solid"/>
+                      <a:round/>
+                      <a:headEnd type="none" w="med" len="med"/>
+                      <a:tailEnd type="none" w="med" len="med"/>
+                    </a:lnB>
+                    <a:solidFill>
+                      <a:schemeClr val="bg1"/>
+                    </a:solidFill>
+                  </a:tcPr>
+                </a:tc>
+                <a:tc>
+                  <a:txBody>
+                    <a:bodyPr/>
+                    <a:lstStyle/>
+                    <a:p>
+                      <a:pPr algn="ctr" indent="0" marL="0">
+                        <a:buNone/>
+                      </a:pPr>
+                      <a:r>
+                        <a:rPr lang="en-US" sz="900" b="1" dirty="0">
+                          <a:solidFill>
+                            <a:schemeClr val="accent1"/>
+                          </a:solidFill>
+                        </a:rPr>
+                        <a:t>Thật</a:t>
+                      </a:r>
+                      <a:endParaRPr lang="en-US" sz="900" dirty="0"/>
+                    </a:p>
+                  </a:txBody>
+                  <a:tcPr marL="36576" marR="36576" marT="36576" marB="36576" anchor="ctr">
+                    <a:lnL w="7620" cap="flat" cmpd="sng" algn="ctr">
+                      <a:solidFill>
+                        <a:srgbClr val="CBD5E1"/>
+                      </a:solidFill>
+                      <a:prstDash val="solid"/>
+                      <a:round/>
+                      <a:headEnd type="none" w="med" len="med"/>
+                      <a:tailEnd type="none" w="med" len="med"/>
+                    </a:lnL>
+                    <a:lnR w="7620" cap="flat" cmpd="sng" algn="ctr">
+                      <a:solidFill>
+                        <a:srgbClr val="CBD5E1"/>
+                      </a:solidFill>
+                      <a:prstDash val="solid"/>
+                      <a:round/>
+                      <a:headEnd type="none" w="med" len="med"/>
+                      <a:tailEnd type="none" w="med" len="med"/>
+                    </a:lnR>
+                    <a:lnT w="7620" cap="flat" cmpd="sng" algn="ctr">
+                      <a:solidFill>
+                        <a:srgbClr val="CBD5E1"/>
+                      </a:solidFill>
+                      <a:prstDash val="solid"/>
+                      <a:round/>
+                      <a:headEnd type="none" w="med" len="med"/>
+                      <a:tailEnd type="none" w="med" len="med"/>
+                    </a:lnT>
+                    <a:lnB w="7620" cap="flat" cmpd="sng" algn="ctr">
+                      <a:solidFill>
+                        <a:srgbClr val="CBD5E1"/>
+                      </a:solidFill>
+                      <a:prstDash val="solid"/>
+                      <a:round/>
+                      <a:headEnd type="none" w="med" len="med"/>
+                      <a:tailEnd type="none" w="med" len="med"/>
+                    </a:lnB>
+                    <a:solidFill>
+                      <a:schemeClr val="bg1"/>
+                    </a:solidFill>
+                  </a:tcPr>
+                </a:tc>
+              </a:tr>
+              <a:tr h="301752">
+                <a:tc>
+                  <a:txBody>
+                    <a:bodyPr/>
+                    <a:lstStyle/>
+                    <a:p>
+                      <a:pPr indent="0" marL="0">
+                        <a:buNone/>
+                      </a:pPr>
+                      <a:r>
+                        <a:rPr lang="en-US" sz="900" b="1" dirty="0">
+                          <a:solidFill>
+                            <a:schemeClr val="tx1"/>
+                          </a:solidFill>
+                        </a:rPr>
+                        <a:t>Triển khai</a:t>
+                      </a:r>
+                      <a:endParaRPr lang="en-US" sz="900" dirty="0"/>
+                    </a:p>
+                  </a:txBody>
+                  <a:tcPr marL="36576" marR="36576" marT="36576" marB="36576" anchor="ctr">
+                    <a:lnL w="7620" cap="flat" cmpd="sng" algn="ctr">
+                      <a:solidFill>
+                        <a:srgbClr val="CBD5E1"/>
+                      </a:solidFill>
+                      <a:prstDash val="solid"/>
+                      <a:round/>
+                      <a:headEnd type="none" w="med" len="med"/>
+                      <a:tailEnd type="none" w="med" len="med"/>
+                    </a:lnL>
+                    <a:lnR w="7620" cap="flat" cmpd="sng" algn="ctr">
+                      <a:solidFill>
+                        <a:srgbClr val="CBD5E1"/>
+                      </a:solidFill>
+                      <a:prstDash val="solid"/>
+                      <a:round/>
+                      <a:headEnd type="none" w="med" len="med"/>
+                      <a:tailEnd type="none" w="med" len="med"/>
+                    </a:lnR>
+                    <a:lnT w="7620" cap="flat" cmpd="sng" algn="ctr">
+                      <a:solidFill>
+                        <a:srgbClr val="CBD5E1"/>
+                      </a:solidFill>
+                      <a:prstDash val="solid"/>
+                      <a:round/>
+                      <a:headEnd type="none" w="med" len="med"/>
+                      <a:tailEnd type="none" w="med" len="med"/>
+                    </a:lnT>
+                    <a:lnB w="7620" cap="flat" cmpd="sng" algn="ctr">
+                      <a:solidFill>
+                        <a:srgbClr val="CBD5E1"/>
+                      </a:solidFill>
+                      <a:prstDash val="solid"/>
+                      <a:round/>
+                      <a:headEnd type="none" w="med" len="med"/>
+                      <a:tailEnd type="none" w="med" len="med"/>
+                    </a:lnB>
+                    <a:solidFill>
+                      <a:schemeClr val="bg1"/>
+                    </a:solidFill>
+                  </a:tcPr>
+                </a:tc>
+                <a:tc>
+                  <a:txBody>
+                    <a:bodyPr/>
+                    <a:lstStyle/>
+                    <a:p>
+                      <a:pPr indent="0" marL="0">
+                        <a:buNone/>
+                      </a:pPr>
+                      <a:r>
+                        <a:rPr lang="en-US" sz="900" dirty="0">
+                          <a:solidFill>
+                            <a:schemeClr val="tx1"/>
+                          </a:solidFill>
+                        </a:rPr>
+                        <a:t>Hostinger Node.js 22 · /api/health có commit</a:t>
+                      </a:r>
+                      <a:endParaRPr lang="en-US" sz="900" dirty="0"/>
+                    </a:p>
+                  </a:txBody>
+                  <a:tcPr marL="36576" marR="36576" marT="36576" marB="36576" anchor="ctr">
+                    <a:lnL w="7620" cap="flat" cmpd="sng" algn="ctr">
+                      <a:solidFill>
+                        <a:srgbClr val="CBD5E1"/>
+                      </a:solidFill>
+                      <a:prstDash val="solid"/>
+                      <a:round/>
+                      <a:headEnd type="none" w="med" len="med"/>
+                      <a:tailEnd type="none" w="med" len="med"/>
+                    </a:lnL>
+                    <a:lnR w="7620" cap="flat" cmpd="sng" algn="ctr">
+                      <a:solidFill>
+                        <a:srgbClr val="CBD5E1"/>
+                      </a:solidFill>
+                      <a:prstDash val="solid"/>
+                      <a:round/>
+                      <a:headEnd type="none" w="med" len="med"/>
+                      <a:tailEnd type="none" w="med" len="med"/>
+                    </a:lnR>
+                    <a:lnT w="7620" cap="flat" cmpd="sng" algn="ctr">
+                      <a:solidFill>
+                        <a:srgbClr val="CBD5E1"/>
+                      </a:solidFill>
+                      <a:prstDash val="solid"/>
+                      <a:round/>
+                      <a:headEnd type="none" w="med" len="med"/>
+                      <a:tailEnd type="none" w="med" len="med"/>
+                    </a:lnT>
+                    <a:lnB w="7620" cap="flat" cmpd="sng" algn="ctr">
+                      <a:solidFill>
+                        <a:srgbClr val="CBD5E1"/>
+                      </a:solidFill>
+                      <a:prstDash val="solid"/>
+                      <a:round/>
+                      <a:headEnd type="none" w="med" len="med"/>
+                      <a:tailEnd type="none" w="med" len="med"/>
+                    </a:lnB>
+                    <a:solidFill>
+                      <a:schemeClr val="bg1"/>
+                    </a:solidFill>
+                  </a:tcPr>
+                </a:tc>
+                <a:tc>
+                  <a:txBody>
+                    <a:bodyPr/>
+                    <a:lstStyle/>
+                    <a:p>
+                      <a:pPr algn="ctr" indent="0" marL="0">
+                        <a:buNone/>
+                      </a:pPr>
+                      <a:r>
+                        <a:rPr lang="en-US" sz="900" b="1" dirty="0">
+                          <a:solidFill>
+                            <a:schemeClr val="accent1"/>
+                          </a:solidFill>
+                        </a:rPr>
+                        <a:t>Thật</a:t>
+                      </a:r>
+                      <a:endParaRPr lang="en-US" sz="900" dirty="0"/>
+                    </a:p>
+                  </a:txBody>
+                  <a:tcPr marL="36576" marR="36576" marT="36576" marB="36576" anchor="ctr">
+                    <a:lnL w="7620" cap="flat" cmpd="sng" algn="ctr">
+                      <a:solidFill>
+                        <a:srgbClr val="CBD5E1"/>
+                      </a:solidFill>
+                      <a:prstDash val="solid"/>
+                      <a:round/>
+                      <a:headEnd type="none" w="med" len="med"/>
+                      <a:tailEnd type="none" w="med" len="med"/>
+                    </a:lnL>
+                    <a:lnR w="7620" cap="flat" cmpd="sng" algn="ctr">
+                      <a:solidFill>
+                        <a:srgbClr val="CBD5E1"/>
+                      </a:solidFill>
+                      <a:prstDash val="solid"/>
+                      <a:round/>
+                      <a:headEnd type="none" w="med" len="med"/>
+                      <a:tailEnd type="none" w="med" len="med"/>
+                    </a:lnR>
+                    <a:lnT w="7620" cap="flat" cmpd="sng" algn="ctr">
+                      <a:solidFill>
+                        <a:srgbClr val="CBD5E1"/>
+                      </a:solidFill>
+                      <a:prstDash val="solid"/>
+                      <a:round/>
+                      <a:headEnd type="none" w="med" len="med"/>
+                      <a:tailEnd type="none" w="med" len="med"/>
+                    </a:lnT>
+                    <a:lnB w="7620" cap="flat" cmpd="sng" algn="ctr">
+                      <a:solidFill>
+                        <a:srgbClr val="CBD5E1"/>
+                      </a:solidFill>
+                      <a:prstDash val="solid"/>
+                      <a:round/>
+                      <a:headEnd type="none" w="med" len="med"/>
+                      <a:tailEnd type="none" w="med" len="med"/>
+                    </a:lnB>
+                    <a:solidFill>
+                      <a:schemeClr val="bg1"/>
+                    </a:solidFill>
+                  </a:tcPr>
+                </a:tc>
+              </a:tr>
+              <a:tr h="301752">
+                <a:tc>
+                  <a:txBody>
+                    <a:bodyPr/>
+                    <a:lstStyle/>
+                    <a:p>
+                      <a:pPr indent="0" marL="0">
+                        <a:buNone/>
+                      </a:pPr>
+                      <a:r>
+                        <a:rPr lang="en-US" sz="900" b="1" dirty="0">
+                          <a:solidFill>
+                            <a:schemeClr val="tx1"/>
+                          </a:solidFill>
+                        </a:rPr>
+                        <a:t>ERP, ngân hàng, TCT</a:t>
+                      </a:r>
+                      <a:endParaRPr lang="en-US" sz="900" dirty="0"/>
+                    </a:p>
+                  </a:txBody>
+                  <a:tcPr marL="36576" marR="36576" marT="36576" marB="36576" anchor="ctr">
+                    <a:lnL w="7620" cap="flat" cmpd="sng" algn="ctr">
+                      <a:solidFill>
+                        <a:srgbClr val="CBD5E1"/>
+                      </a:solidFill>
+                      <a:prstDash val="solid"/>
+                      <a:round/>
+                      <a:headEnd type="none" w="med" len="med"/>
+                      <a:tailEnd type="none" w="med" len="med"/>
+                    </a:lnL>
+                    <a:lnR w="7620" cap="flat" cmpd="sng" algn="ctr">
+                      <a:solidFill>
+                        <a:srgbClr val="CBD5E1"/>
+                      </a:solidFill>
+                      <a:prstDash val="solid"/>
+                      <a:round/>
+                      <a:headEnd type="none" w="med" len="med"/>
+                      <a:tailEnd type="none" w="med" len="med"/>
+                    </a:lnR>
+                    <a:lnT w="7620" cap="flat" cmpd="sng" algn="ctr">
+                      <a:solidFill>
+                        <a:srgbClr val="CBD5E1"/>
+                      </a:solidFill>
+                      <a:prstDash val="solid"/>
+                      <a:round/>
+                      <a:headEnd type="none" w="med" len="med"/>
+                      <a:tailEnd type="none" w="med" len="med"/>
+                    </a:lnT>
+                    <a:lnB w="7620" cap="flat" cmpd="sng" algn="ctr">
+                      <a:solidFill>
+                        <a:srgbClr val="CBD5E1"/>
+                      </a:solidFill>
+                      <a:prstDash val="solid"/>
+                      <a:round/>
+                      <a:headEnd type="none" w="med" len="med"/>
+                      <a:tailEnd type="none" w="med" len="med"/>
+                    </a:lnB>
+                    <a:solidFill>
+                      <a:schemeClr val="bg1"/>
+                    </a:solidFill>
+                  </a:tcPr>
+                </a:tc>
+                <a:tc>
+                  <a:txBody>
+                    <a:bodyPr/>
+                    <a:lstStyle/>
+                    <a:p>
+                      <a:pPr indent="0" marL="0">
+                        <a:buNone/>
+                      </a:pPr>
+                      <a:r>
+                        <a:rPr lang="en-US" sz="900" dirty="0">
+                          <a:solidFill>
+                            <a:schemeClr val="tx1"/>
+                          </a:solidFill>
+                        </a:rPr>
+                        <a:t>Chỉ xuất payload (Mở rộng · beta)</a:t>
+                      </a:r>
+                      <a:endParaRPr lang="en-US" sz="900" dirty="0"/>
+                    </a:p>
+                  </a:txBody>
+                  <a:tcPr marL="36576" marR="36576" marT="36576" marB="36576" anchor="ctr">
+                    <a:lnL w="7620" cap="flat" cmpd="sng" algn="ctr">
+                      <a:solidFill>
+                        <a:srgbClr val="CBD5E1"/>
+                      </a:solidFill>
+                      <a:prstDash val="solid"/>
+                      <a:round/>
+                      <a:headEnd type="none" w="med" len="med"/>
+                      <a:tailEnd type="none" w="med" len="med"/>
+                    </a:lnL>
+                    <a:lnR w="7620" cap="flat" cmpd="sng" algn="ctr">
+                      <a:solidFill>
+                        <a:srgbClr val="CBD5E1"/>
+                      </a:solidFill>
+                      <a:prstDash val="solid"/>
+                      <a:round/>
+                      <a:headEnd type="none" w="med" len="med"/>
+                      <a:tailEnd type="none" w="med" len="med"/>
+                    </a:lnR>
+                    <a:lnT w="7620" cap="flat" cmpd="sng" algn="ctr">
+                      <a:solidFill>
+                        <a:srgbClr val="CBD5E1"/>
+                      </a:solidFill>
+                      <a:prstDash val="solid"/>
+                      <a:round/>
+                      <a:headEnd type="none" w="med" len="med"/>
+                      <a:tailEnd type="none" w="med" len="med"/>
+                    </a:lnT>
+                    <a:lnB w="7620" cap="flat" cmpd="sng" algn="ctr">
+                      <a:solidFill>
+                        <a:srgbClr val="CBD5E1"/>
+                      </a:solidFill>
+                      <a:prstDash val="solid"/>
+                      <a:round/>
+                      <a:headEnd type="none" w="med" len="med"/>
+                      <a:tailEnd type="none" w="med" len="med"/>
+                    </a:lnB>
+                    <a:solidFill>
+                      <a:schemeClr val="bg1"/>
+                    </a:solidFill>
+                  </a:tcPr>
+                </a:tc>
+                <a:tc>
+                  <a:txBody>
+                    <a:bodyPr/>
+                    <a:lstStyle/>
+                    <a:p>
+                      <a:pPr algn="ctr" indent="0" marL="0">
+                        <a:buNone/>
+                      </a:pPr>
+                      <a:r>
+                        <a:rPr lang="en-US" sz="900" b="1" dirty="0">
+                          <a:solidFill>
+                            <a:schemeClr val="tx2"/>
+                          </a:solidFill>
+                        </a:rPr>
+                        <a:t>Giả lập</a:t>
+                      </a:r>
+                      <a:endParaRPr lang="en-US" sz="900" dirty="0"/>
+                    </a:p>
+                  </a:txBody>
+                  <a:tcPr marL="36576" marR="36576" marT="36576" marB="36576" anchor="ctr">
+                    <a:lnL w="7620" cap="flat" cmpd="sng" algn="ctr">
+                      <a:solidFill>
+                        <a:srgbClr val="CBD5E1"/>
+                      </a:solidFill>
+                      <a:prstDash val="solid"/>
+                      <a:round/>
+                      <a:headEnd type="none" w="med" len="med"/>
+                      <a:tailEnd type="none" w="med" len="med"/>
+                    </a:lnL>
+                    <a:lnR w="7620" cap="flat" cmpd="sng" algn="ctr">
+                      <a:solidFill>
+                        <a:srgbClr val="CBD5E1"/>
+                      </a:solidFill>
+                      <a:prstDash val="solid"/>
+                      <a:round/>
+                      <a:headEnd type="none" w="med" len="med"/>
+                      <a:tailEnd type="none" w="med" len="med"/>
+                    </a:lnR>
+                    <a:lnT w="7620" cap="flat" cmpd="sng" algn="ctr">
+                      <a:solidFill>
+                        <a:srgbClr val="CBD5E1"/>
+                      </a:solidFill>
+                      <a:prstDash val="solid"/>
+                      <a:round/>
+                      <a:headEnd type="none" w="med" len="med"/>
+                      <a:tailEnd type="none" w="med" len="med"/>
+                    </a:lnT>
+                    <a:lnB w="7620" cap="flat" cmpd="sng" algn="ctr">
+                      <a:solidFill>
+                        <a:srgbClr val="CBD5E1"/>
+                      </a:solidFill>
+                      <a:prstDash val="solid"/>
+                      <a:round/>
+                      <a:headEnd type="none" w="med" len="med"/>
+                      <a:tailEnd type="none" w="med" len="med"/>
+                    </a:lnB>
+                    <a:solidFill>
+                      <a:schemeClr val="bg1"/>
+                    </a:solidFill>
+                  </a:tcPr>
+                </a:tc>
+              </a:tr>
+              <a:tr h="301752">
+                <a:tc>
+                  <a:txBody>
+                    <a:bodyPr/>
+                    <a:lstStyle/>
+                    <a:p>
+                      <a:pPr indent="0" marL="0">
+                        <a:buNone/>
+                      </a:pPr>
+                      <a:r>
+                        <a:rPr lang="en-US" sz="900" b="1" dirty="0">
+                          <a:solidFill>
+                            <a:schemeClr val="tx1"/>
+                          </a:solidFill>
+                        </a:rPr>
+                        <a:t>Dữ liệu kiểm thử</a:t>
+                      </a:r>
+                      <a:endParaRPr lang="en-US" sz="900" dirty="0"/>
+                    </a:p>
+                  </a:txBody>
+                  <a:tcPr marL="36576" marR="36576" marT="36576" marB="36576" anchor="ctr">
+                    <a:lnL w="7620" cap="flat" cmpd="sng" algn="ctr">
+                      <a:solidFill>
+                        <a:srgbClr val="CBD5E1"/>
+                      </a:solidFill>
+                      <a:prstDash val="solid"/>
+                      <a:round/>
+                      <a:headEnd type="none" w="med" len="med"/>
+                      <a:tailEnd type="none" w="med" len="med"/>
+                    </a:lnL>
+                    <a:lnR w="7620" cap="flat" cmpd="sng" algn="ctr">
+                      <a:solidFill>
+                        <a:srgbClr val="CBD5E1"/>
+                      </a:solidFill>
+                      <a:prstDash val="solid"/>
+                      <a:round/>
+                      <a:headEnd type="none" w="med" len="med"/>
+                      <a:tailEnd type="none" w="med" len="med"/>
+                    </a:lnR>
+                    <a:lnT w="7620" cap="flat" cmpd="sng" algn="ctr">
+                      <a:solidFill>
+                        <a:srgbClr val="CBD5E1"/>
+                      </a:solidFill>
+                      <a:prstDash val="solid"/>
+                      <a:round/>
+                      <a:headEnd type="none" w="med" len="med"/>
+                      <a:tailEnd type="none" w="med" len="med"/>
+                    </a:lnT>
+                    <a:lnB w="7620" cap="flat" cmpd="sng" algn="ctr">
+                      <a:solidFill>
+                        <a:srgbClr val="CBD5E1"/>
+                      </a:solidFill>
+                      <a:prstDash val="solid"/>
+                      <a:round/>
+                      <a:headEnd type="none" w="med" len="med"/>
+                      <a:tailEnd type="none" w="med" len="med"/>
+                    </a:lnB>
+                    <a:solidFill>
+                      <a:schemeClr val="bg1"/>
+                    </a:solidFill>
+                  </a:tcPr>
+                </a:tc>
+                <a:tc>
+                  <a:txBody>
+                    <a:bodyPr/>
+                    <a:lstStyle/>
+                    <a:p>
+                      <a:pPr indent="0" marL="0">
+                        <a:buNone/>
+                      </a:pPr>
+                      <a:r>
+                        <a:rPr lang="en-US" sz="900" dirty="0">
+                          <a:solidFill>
+                            <a:schemeClr val="tx1"/>
+                          </a:solidFill>
+                        </a:rPr>
+                        <a:t>Verify, 60 ca, 72 ca red team; XML mẫu</a:t>
+                      </a:r>
+                      <a:endParaRPr lang="en-US" sz="900" dirty="0"/>
+                    </a:p>
+                  </a:txBody>
+                  <a:tcPr marL="36576" marR="36576" marT="36576" marB="36576" anchor="ctr">
+                    <a:lnL w="7620" cap="flat" cmpd="sng" algn="ctr">
+                      <a:solidFill>
+                        <a:srgbClr val="CBD5E1"/>
+                      </a:solidFill>
+                      <a:prstDash val="solid"/>
+                      <a:round/>
+                      <a:headEnd type="none" w="med" len="med"/>
+                      <a:tailEnd type="none" w="med" len="med"/>
+                    </a:lnL>
+                    <a:lnR w="7620" cap="flat" cmpd="sng" algn="ctr">
+                      <a:solidFill>
+                        <a:srgbClr val="CBD5E1"/>
+                      </a:solidFill>
+                      <a:prstDash val="solid"/>
+                      <a:round/>
+                      <a:headEnd type="none" w="med" len="med"/>
+                      <a:tailEnd type="none" w="med" len="med"/>
+                    </a:lnR>
+                    <a:lnT w="7620" cap="flat" cmpd="sng" algn="ctr">
+                      <a:solidFill>
+                        <a:srgbClr val="CBD5E1"/>
+                      </a:solidFill>
+                      <a:prstDash val="solid"/>
+                      <a:round/>
+                      <a:headEnd type="none" w="med" len="med"/>
+                      <a:tailEnd type="none" w="med" len="med"/>
+                    </a:lnT>
+                    <a:lnB w="7620" cap="flat" cmpd="sng" algn="ctr">
+                      <a:solidFill>
+                        <a:srgbClr val="CBD5E1"/>
+                      </a:solidFill>
+                      <a:prstDash val="solid"/>
+                      <a:round/>
+                      <a:headEnd type="none" w="med" len="med"/>
+                      <a:tailEnd type="none" w="med" len="med"/>
+                    </a:lnB>
+                    <a:solidFill>
+                      <a:schemeClr val="bg1"/>
+                    </a:solidFill>
+                  </a:tcPr>
+                </a:tc>
+                <a:tc>
+                  <a:txBody>
+                    <a:bodyPr/>
+                    <a:lstStyle/>
+                    <a:p>
+                      <a:pPr algn="ctr" indent="0" marL="0">
+                        <a:buNone/>
+                      </a:pPr>
+                      <a:r>
+                        <a:rPr lang="en-US" sz="900" b="1" dirty="0">
+                          <a:solidFill>
+                            <a:schemeClr val="accent3"/>
+                          </a:solidFill>
+                        </a:rPr>
+                        <a:t>Tổng hợp</a:t>
+                      </a:r>
+                      <a:endParaRPr lang="en-US" sz="900" dirty="0"/>
+                    </a:p>
+                  </a:txBody>
+                  <a:tcPr marL="36576" marR="36576" marT="36576" marB="36576" anchor="ctr">
+                    <a:lnL w="7620" cap="flat" cmpd="sng" algn="ctr">
+                      <a:solidFill>
+                        <a:srgbClr val="CBD5E1"/>
+                      </a:solidFill>
+                      <a:prstDash val="solid"/>
+                      <a:round/>
+                      <a:headEnd type="none" w="med" len="med"/>
+                      <a:tailEnd type="none" w="med" len="med"/>
+                    </a:lnL>
+                    <a:lnR w="7620" cap="flat" cmpd="sng" algn="ctr">
+                      <a:solidFill>
+                        <a:srgbClr val="CBD5E1"/>
+                      </a:solidFill>
+                      <a:prstDash val="solid"/>
+                      <a:round/>
+                      <a:headEnd type="none" w="med" len="med"/>
+                      <a:tailEnd type="none" w="med" len="med"/>
+                    </a:lnR>
+                    <a:lnT w="7620" cap="flat" cmpd="sng" algn="ctr">
+                      <a:solidFill>
+                        <a:srgbClr val="CBD5E1"/>
+                      </a:solidFill>
+                      <a:prstDash val="solid"/>
+                      <a:round/>
+                      <a:headEnd type="none" w="med" len="med"/>
+                      <a:tailEnd type="none" w="med" len="med"/>
+                    </a:lnT>
+                    <a:lnB w="7620" cap="flat" cmpd="sng" algn="ctr">
                       <a:solidFill>
                         <a:srgbClr val="CBD5E1"/>
                       </a:solidFill>
@@ -5711,14 +5936,14 @@
       </p:graphicFrame>
       <p:sp>
         <p:nvSpPr>
-          <p:cNvPr id="17" name="Architecture notes"/>
+          <p:cNvPr id="5" name="Architecture notes"/>
           <p:cNvSpPr txBox="1"/>
           <p:nvPr/>
         </p:nvSpPr>
         <p:spPr>
           <a:xfrm>
-            <a:off x="4023360" y="3657600"/>
-            <a:ext cx="4663440" cy="914400"/>
+            <a:off x="4526280" y="4160520"/>
+            <a:ext cx="4160520" cy="457200"/>
           </a:xfrm>
           <a:prstGeom prst="rect">
             <a:avLst/>
@@ -5727,14 +5952,14 @@
           <a:ln/>
         </p:spPr>
         <p:txBody>
-          <a:bodyPr wrap="square" lIns="0" tIns="0" rIns="0" bIns="0" rtlCol="0" anchor="t"/>
+          <a:bodyPr wrap="square" lIns="0" tIns="0" rIns="0" bIns="0" rtlCol="0" anchor="ctr"/>
           <a:lstStyle/>
           <a:p>
             <a:pPr indent="0" marL="0">
               <a:buNone/>
             </a:pPr>
             <a:r>
-              <a:rPr lang="en-US" sz="1200" b="1" dirty="0">
+              <a:rPr lang="en-US" sz="1050" b="1" dirty="0">
                 <a:solidFill>
                   <a:schemeClr val="accent1"/>
                 </a:solidFill>
@@ -5745,14 +5970,14 @@
               <a:buNone/>
             </a:pPr>
             <a:r>
-              <a:rPr lang="en-US" sz="1200" dirty="0">
+              <a:rPr lang="en-US" sz="1050" dirty="0">
                 <a:solidFill>
                   <a:schemeClr val="tx1"/>
                 </a:solidFill>
               </a:rPr>
-              <a:t>một lượt quy tắc mỗi hồ sơ; AI có timeout; quá hạn → giữ hồ sơ. Kiểm chứng: /api/health hiện commit đang chạy, CI chạy test mỗi lần đẩy mã.</a:t>
+              <a:t>một lượt quy tắc mỗi hồ sơ, AI có timeout, quá hạn → giữ hồ sơ.</a:t>
             </a:r>
-            <a:endParaRPr lang="en-US" sz="1200" dirty="0"/>
+            <a:endParaRPr lang="en-US" sz="1050" dirty="0"/>
           </a:p>
         </p:txBody>
       </p:sp>
